--- a/presentations/La_Minute_Copilot_Personas.pptx
+++ b/presentations/La_Minute_Copilot_Personas.pptx
@@ -3859,7 +3859,7 @@
     <p:bg>
       <p:bgPr>
         <a:solidFill>
-          <a:srgbClr val="0078D4"/>
+          <a:srgbClr val="E6F0EA"/>
         </a:solidFill>
         <a:effectLst/>
       </p:bgPr>
@@ -3873,14 +3873,58 @@
       <p:grpSpPr/>
       <p:sp>
         <p:nvSpPr>
-          <p:cNvPr id="2" name="TextBox 1"/>
+          <p:cNvPr id="2" name="Rectangle 1"/>
+          <p:cNvSpPr/>
+          <p:nvPr/>
+        </p:nvSpPr>
+        <p:spPr>
+          <a:xfrm>
+            <a:off x="0" y="0"/>
+            <a:ext cx="6766560" cy="6858000"/>
+          </a:xfrm>
+          <a:prstGeom prst="rect">
+            <a:avLst/>
+          </a:prstGeom>
+          <a:solidFill>
+            <a:srgbClr val="00874E"/>
+          </a:solidFill>
+          <a:ln>
+            <a:noFill/>
+          </a:ln>
+          <a:effectLst/>
+        </p:spPr>
+        <p:style>
+          <a:lnRef idx="1">
+            <a:schemeClr val="accent1"/>
+          </a:lnRef>
+          <a:fillRef idx="3">
+            <a:schemeClr val="accent1"/>
+          </a:fillRef>
+          <a:effectRef idx="2">
+            <a:schemeClr val="accent1"/>
+          </a:effectRef>
+          <a:fontRef idx="minor">
+            <a:schemeClr val="lt1"/>
+          </a:fontRef>
+        </p:style>
+        <p:txBody>
+          <a:bodyPr rtlCol="0" anchor="ctr"/>
+          <a:lstStyle/>
+          <a:p>
+            <a:pPr algn="ctr"/>
+          </a:p>
+        </p:txBody>
+      </p:sp>
+      <p:sp>
+        <p:nvSpPr>
+          <p:cNvPr id="3" name="TextBox 2"/>
           <p:cNvSpPr txBox="1"/>
           <p:nvPr/>
         </p:nvSpPr>
         <p:spPr>
           <a:xfrm>
-            <a:off x="914400" y="1828800"/>
-            <a:ext cx="10058400" cy="1097280"/>
+            <a:off x="640080" y="1828800"/>
+            <a:ext cx="5669280" cy="1463040"/>
           </a:xfrm>
           <a:prstGeom prst="rect">
             <a:avLst/>
@@ -3888,13 +3932,13 @@
           <a:noFill/>
         </p:spPr>
         <p:txBody>
-          <a:bodyPr wrap="square">
+          <a:bodyPr wrap="square" lIns="45720" rIns="45720" tIns="18288" bIns="18288">
             <a:spAutoFit/>
           </a:bodyPr>
           <a:lstStyle/>
           <a:p>
-            <a:pPr algn="ctr">
-              <a:defRPr sz="4800" b="1">
+            <a:pPr algn="l">
+              <a:defRPr sz="4400" b="1">
                 <a:solidFill>
                   <a:srgbClr val="FFFFFF"/>
                 </a:solidFill>
@@ -3902,21 +3946,65 @@
               </a:defRPr>
             </a:pPr>
             <a:r>
-              <a:t>🤖 La minute Copilot</a:t>
-            </a:r>
-          </a:p>
-        </p:txBody>
-      </p:sp>
-      <p:sp>
-        <p:nvSpPr>
-          <p:cNvPr id="3" name="TextBox 2"/>
+              <a:t>La minute Copilot</a:t>
+            </a:r>
+          </a:p>
+        </p:txBody>
+      </p:sp>
+      <p:sp>
+        <p:nvSpPr>
+          <p:cNvPr id="4" name="Rectangle 3"/>
+          <p:cNvSpPr/>
+          <p:nvPr/>
+        </p:nvSpPr>
+        <p:spPr>
+          <a:xfrm>
+            <a:off x="640080" y="3246120"/>
+            <a:ext cx="2926080" cy="36576"/>
+          </a:xfrm>
+          <a:prstGeom prst="rect">
+            <a:avLst/>
+          </a:prstGeom>
+          <a:solidFill>
+            <a:srgbClr val="FFFFFF"/>
+          </a:solidFill>
+          <a:ln>
+            <a:noFill/>
+          </a:ln>
+          <a:effectLst/>
+        </p:spPr>
+        <p:style>
+          <a:lnRef idx="1">
+            <a:schemeClr val="accent1"/>
+          </a:lnRef>
+          <a:fillRef idx="3">
+            <a:schemeClr val="accent1"/>
+          </a:fillRef>
+          <a:effectRef idx="2">
+            <a:schemeClr val="accent1"/>
+          </a:effectRef>
+          <a:fontRef idx="minor">
+            <a:schemeClr val="lt1"/>
+          </a:fontRef>
+        </p:style>
+        <p:txBody>
+          <a:bodyPr rtlCol="0" anchor="ctr"/>
+          <a:lstStyle/>
+          <a:p>
+            <a:pPr algn="ctr"/>
+          </a:p>
+        </p:txBody>
+      </p:sp>
+      <p:sp>
+        <p:nvSpPr>
+          <p:cNvPr id="5" name="TextBox 4"/>
           <p:cNvSpPr txBox="1"/>
           <p:nvPr/>
         </p:nvSpPr>
         <p:spPr>
           <a:xfrm>
-            <a:off x="914400" y="2926080"/>
-            <a:ext cx="10058400" cy="731520"/>
+            <a:off x="640080" y="3429000"/>
+            <a:ext cx="5669280" cy="640080"/>
           </a:xfrm>
           <a:prstGeom prst="rect">
             <a:avLst/>
@@ -3924,35 +4012,35 @@
           <a:noFill/>
         </p:spPr>
         <p:txBody>
-          <a:bodyPr wrap="square">
+          <a:bodyPr wrap="square" lIns="45720" rIns="45720" tIns="18288" bIns="18288">
             <a:spAutoFit/>
           </a:bodyPr>
           <a:lstStyle/>
           <a:p>
-            <a:pPr algn="ctr">
-              <a:defRPr sz="2800" b="0">
-                <a:solidFill>
-                  <a:srgbClr val="AAD4F0"/>
+            <a:pPr algn="l">
+              <a:defRPr sz="2200" b="0">
+                <a:solidFill>
+                  <a:srgbClr val="FFFFFF"/>
                 </a:solidFill>
                 <a:latin typeface="Calibri"/>
               </a:defRPr>
             </a:pPr>
             <a:r>
-              <a:t>🎭 L'importance des personas dans les prompts</a:t>
-            </a:r>
-          </a:p>
-        </p:txBody>
-      </p:sp>
-      <p:sp>
-        <p:nvSpPr>
-          <p:cNvPr id="4" name="TextBox 3"/>
+              <a:t>L'importance des personas dans les prompts</a:t>
+            </a:r>
+          </a:p>
+        </p:txBody>
+      </p:sp>
+      <p:sp>
+        <p:nvSpPr>
+          <p:cNvPr id="6" name="TextBox 5"/>
           <p:cNvSpPr txBox="1"/>
           <p:nvPr/>
         </p:nvSpPr>
         <p:spPr>
           <a:xfrm>
-            <a:off x="914400" y="4114800"/>
-            <a:ext cx="10058400" cy="548640"/>
+            <a:off x="640080" y="4572000"/>
+            <a:ext cx="5669280" cy="365760"/>
           </a:xfrm>
           <a:prstGeom prst="rect">
             <a:avLst/>
@@ -3960,15 +4048,15 @@
           <a:noFill/>
         </p:spPr>
         <p:txBody>
-          <a:bodyPr wrap="square">
+          <a:bodyPr wrap="square" lIns="45720" rIns="45720" tIns="18288" bIns="18288">
             <a:spAutoFit/>
           </a:bodyPr>
           <a:lstStyle/>
           <a:p>
-            <a:pPr algn="ctr">
-              <a:defRPr sz="1600" b="0">
-                <a:solidFill>
-                  <a:srgbClr val="AAD4F0"/>
+            <a:pPr algn="l">
+              <a:defRPr sz="1300" b="0">
+                <a:solidFill>
+                  <a:srgbClr val="CCE0D2"/>
                 </a:solidFill>
                 <a:latin typeface="Calibri"/>
               </a:defRPr>
@@ -3993,7 +4081,7 @@
     <p:bg>
       <p:bgPr>
         <a:solidFill>
-          <a:srgbClr val="FFFFFF"/>
+          <a:srgbClr val="E6F0EA"/>
         </a:solidFill>
         <a:effectLst/>
       </p:bgPr>
@@ -4013,8 +4101,8 @@
         </p:nvSpPr>
         <p:spPr>
           <a:xfrm>
-            <a:off x="457200" y="274320"/>
-            <a:ext cx="10972800" cy="640080"/>
+            <a:off x="457200" y="365760"/>
+            <a:ext cx="10972800" cy="731520"/>
           </a:xfrm>
           <a:prstGeom prst="rect">
             <a:avLst/>
@@ -4022,21 +4110,21 @@
           <a:noFill/>
         </p:spPr>
         <p:txBody>
-          <a:bodyPr wrap="square">
+          <a:bodyPr wrap="square" lIns="45720" rIns="45720" tIns="18288" bIns="18288">
             <a:spAutoFit/>
           </a:bodyPr>
           <a:lstStyle/>
           <a:p>
             <a:pPr algn="l">
-              <a:defRPr sz="3200" b="1">
-                <a:solidFill>
-                  <a:srgbClr val="2B2B2B"/>
+              <a:defRPr sz="2800" b="1">
+                <a:solidFill>
+                  <a:srgbClr val="006B3F"/>
                 </a:solidFill>
                 <a:latin typeface="Calibri"/>
               </a:defRPr>
             </a:pPr>
             <a:r>
-              <a:t>🎭 Qu'est-ce qu'un persona?</a:t>
+              <a:t>Qu'est-ce qu'un persona?</a:t>
             </a:r>
           </a:p>
         </p:txBody>
@@ -4049,8 +4137,8 @@
         </p:nvSpPr>
         <p:spPr>
           <a:xfrm>
-            <a:off x="457200" y="914400"/>
-            <a:ext cx="10972800" cy="457200"/>
+            <a:off x="457200" y="1005840"/>
+            <a:ext cx="10972800" cy="411480"/>
           </a:xfrm>
           <a:prstGeom prst="rect">
             <a:avLst/>
@@ -4058,13 +4146,13 @@
           <a:noFill/>
         </p:spPr>
         <p:txBody>
-          <a:bodyPr wrap="square">
+          <a:bodyPr wrap="square" lIns="45720" rIns="45720" tIns="18288" bIns="18288">
             <a:spAutoFit/>
           </a:bodyPr>
           <a:lstStyle/>
           <a:p>
             <a:pPr algn="l">
-              <a:defRPr sz="1800" b="0">
+              <a:defRPr sz="1500" b="0">
                 <a:solidFill>
                   <a:srgbClr val="6B6B6B"/>
                 </a:solidFill>
@@ -4079,113 +4167,25 @@
       </p:sp>
       <p:sp>
         <p:nvSpPr>
-          <p:cNvPr id="4" name="TextBox 3"/>
-          <p:cNvSpPr txBox="1"/>
-          <p:nvPr/>
-        </p:nvSpPr>
-        <p:spPr>
-          <a:xfrm>
-            <a:off x="457200" y="1554480"/>
-            <a:ext cx="10972800" cy="1371600"/>
-          </a:xfrm>
-          <a:prstGeom prst="rect">
-            <a:avLst/>
-          </a:prstGeom>
-          <a:noFill/>
-        </p:spPr>
-        <p:txBody>
-          <a:bodyPr wrap="square">
-            <a:spAutoFit/>
-          </a:bodyPr>
-          <a:lstStyle/>
-          <a:p>
-            <a:pPr>
-              <a:spcAft>
-                <a:spcPts val="400"/>
-              </a:spcAft>
-              <a:defRPr sz="1400">
-                <a:solidFill>
-                  <a:srgbClr val="2B2B2B"/>
-                </a:solidFill>
-                <a:latin typeface="Calibri"/>
-              </a:defRPr>
-            </a:pPr>
-            <a:r>
-              <a:t>• Un persona = un rôle + un contexte + un ton</a:t>
-            </a:r>
-          </a:p>
-          <a:p>
-            <a:pPr>
-              <a:spcAft>
-                <a:spcPts val="400"/>
-              </a:spcAft>
-              <a:defRPr sz="1400">
-                <a:solidFill>
-                  <a:srgbClr val="2B2B2B"/>
-                </a:solidFill>
-                <a:latin typeface="Calibri"/>
-              </a:defRPr>
-            </a:pPr>
-            <a:r>
-              <a:t>• Copilot adapte sa réponse selon le persona donné</a:t>
-            </a:r>
-          </a:p>
-          <a:p>
-            <a:pPr>
-              <a:spcAft>
-                <a:spcPts val="400"/>
-              </a:spcAft>
-              <a:defRPr sz="1400">
-                <a:solidFill>
-                  <a:srgbClr val="2B2B2B"/>
-                </a:solidFill>
-                <a:latin typeface="Calibri"/>
-              </a:defRPr>
-            </a:pPr>
-            <a:r>
-              <a:t>• Sans persona: réponse générique et moyenne</a:t>
-            </a:r>
-          </a:p>
-          <a:p>
-            <a:pPr>
-              <a:spcAft>
-                <a:spcPts val="400"/>
-              </a:spcAft>
-              <a:defRPr sz="1400">
-                <a:solidFill>
-                  <a:srgbClr val="2B2B2B"/>
-                </a:solidFill>
-                <a:latin typeface="Calibri"/>
-              </a:defRPr>
-            </a:pPr>
-            <a:r>
-              <a:t>• Avec persona: réponse experte et ciblée</a:t>
-            </a:r>
-          </a:p>
-        </p:txBody>
-      </p:sp>
-      <p:sp>
-        <p:nvSpPr>
-          <p:cNvPr id="5" name="Rectangle 4"/>
+          <p:cNvPr id="4" name="Rectangle 3"/>
           <p:cNvSpPr/>
           <p:nvPr/>
         </p:nvSpPr>
         <p:spPr>
           <a:xfrm>
-            <a:off x="457200" y="3017520"/>
-            <a:ext cx="5212080" cy="3657600"/>
+            <a:off x="457200" y="1508760"/>
+            <a:ext cx="11274552" cy="18288"/>
           </a:xfrm>
           <a:prstGeom prst="rect">
             <a:avLst/>
           </a:prstGeom>
           <a:solidFill>
-            <a:srgbClr val="FFFFFF"/>
+            <a:srgbClr val="00874E"/>
           </a:solidFill>
           <a:ln>
-            <a:solidFill>
-              <a:srgbClr val="E0E0E0"/>
-            </a:solidFill>
+            <a:noFill/>
           </a:ln>
+          <a:effectLst/>
         </p:spPr>
         <p:style>
           <a:lnRef idx="1">
@@ -4211,50 +4211,14 @@
       </p:sp>
       <p:sp>
         <p:nvSpPr>
-          <p:cNvPr id="6" name="TextBox 5"/>
+          <p:cNvPr id="5" name="TextBox 4"/>
           <p:cNvSpPr txBox="1"/>
           <p:nvPr/>
         </p:nvSpPr>
         <p:spPr>
           <a:xfrm>
-            <a:off x="731520" y="3200400"/>
-            <a:ext cx="4663440" cy="457200"/>
-          </a:xfrm>
-          <a:prstGeom prst="rect">
-            <a:avLst/>
-          </a:prstGeom>
-          <a:noFill/>
-        </p:spPr>
-        <p:txBody>
-          <a:bodyPr wrap="square">
-            <a:spAutoFit/>
-          </a:bodyPr>
-          <a:lstStyle/>
-          <a:p>
-            <a:pPr algn="l">
-              <a:defRPr sz="1800" b="1">
-                <a:solidFill>
-                  <a:srgbClr val="EF4444"/>
-                </a:solidFill>
-                <a:latin typeface="Calibri"/>
-              </a:defRPr>
-            </a:pPr>
-            <a:r>
-              <a:t>❌ Sans persona (moyen)</a:t>
-            </a:r>
-          </a:p>
-        </p:txBody>
-      </p:sp>
-      <p:sp>
-        <p:nvSpPr>
-          <p:cNvPr id="7" name="TextBox 6"/>
-          <p:cNvSpPr txBox="1"/>
-          <p:nvPr/>
-        </p:nvSpPr>
-        <p:spPr>
-          <a:xfrm>
-            <a:off x="731520" y="3657600"/>
-            <a:ext cx="4663440" cy="2743200"/>
+            <a:off x="457200" y="1737360"/>
+            <a:ext cx="10972800" cy="1188720"/>
           </a:xfrm>
           <a:prstGeom prst="rect">
             <a:avLst/>
@@ -4271,7 +4235,7 @@
               <a:spcAft>
                 <a:spcPts val="400"/>
               </a:spcAft>
-              <a:defRPr sz="1300">
+              <a:defRPr sz="1400">
                 <a:solidFill>
                   <a:srgbClr val="2B2B2B"/>
                 </a:solidFill>
@@ -4279,7 +4243,7 @@
               </a:defRPr>
             </a:pPr>
             <a:r>
-              <a:t>«Rédige un courriel de suivi»</a:t>
+              <a:t>• Un persona = un rôle + un contexte + un ton</a:t>
             </a:r>
           </a:p>
           <a:p>
@@ -4287,20 +4251,23 @@
               <a:spcAft>
                 <a:spcPts val="400"/>
               </a:spcAft>
-              <a:defRPr sz="1300">
+              <a:defRPr sz="1400">
                 <a:solidFill>
                   <a:srgbClr val="2B2B2B"/>
                 </a:solidFill>
                 <a:latin typeface="Calibri"/>
               </a:defRPr>
             </a:pPr>
+            <a:r>
+              <a:t>• Copilot adapte sa réponse selon le persona donné</a:t>
+            </a:r>
           </a:p>
           <a:p>
             <a:pPr>
               <a:spcAft>
                 <a:spcPts val="400"/>
               </a:spcAft>
-              <a:defRPr sz="1300">
+              <a:defRPr sz="1400">
                 <a:solidFill>
                   <a:srgbClr val="2B2B2B"/>
                 </a:solidFill>
@@ -4308,21 +4275,37 @@
               </a:defRPr>
             </a:pPr>
             <a:r>
-              <a:t>→ Réponse générique, sans personnalité, applicable à personne</a:t>
-            </a:r>
-          </a:p>
-        </p:txBody>
-      </p:sp>
-      <p:sp>
-        <p:nvSpPr>
-          <p:cNvPr id="8" name="Rectangle 7"/>
+              <a:t>• Sans persona: réponse générique et moyenne</a:t>
+            </a:r>
+          </a:p>
+          <a:p>
+            <a:pPr>
+              <a:spcAft>
+                <a:spcPts val="400"/>
+              </a:spcAft>
+              <a:defRPr sz="1400">
+                <a:solidFill>
+                  <a:srgbClr val="2B2B2B"/>
+                </a:solidFill>
+                <a:latin typeface="Calibri"/>
+              </a:defRPr>
+            </a:pPr>
+            <a:r>
+              <a:t>• Avec persona: réponse experte et ciblée</a:t>
+            </a:r>
+          </a:p>
+        </p:txBody>
+      </p:sp>
+      <p:sp>
+        <p:nvSpPr>
+          <p:cNvPr id="6" name="Rectangle 5"/>
           <p:cNvSpPr/>
           <p:nvPr/>
         </p:nvSpPr>
         <p:spPr>
           <a:xfrm>
-            <a:off x="5943600" y="3017520"/>
-            <a:ext cx="5212080" cy="3657600"/>
+            <a:off x="457200" y="2926080"/>
+            <a:ext cx="5212080" cy="3291840"/>
           </a:xfrm>
           <a:prstGeom prst="rect">
             <a:avLst/>
@@ -4335,6 +4318,7 @@
               <a:srgbClr val="E0E0E0"/>
             </a:solidFill>
           </a:ln>
+          <a:effectLst/>
         </p:spPr>
         <p:style>
           <a:lnRef idx="1">
@@ -4358,6 +4342,66 @@
           </a:p>
         </p:txBody>
       </p:sp>
+      <p:pic>
+        <p:nvPicPr>
+          <p:cNvPr id="7" name="Picture 6" descr="circle-x_EF4444_30.png"/>
+          <p:cNvPicPr>
+            <a:picLocks noChangeAspect="1"/>
+          </p:cNvPicPr>
+          <p:nvPr/>
+        </p:nvPicPr>
+        <p:blipFill>
+          <a:blip r:embed="rId3"/>
+          <a:stretch>
+            <a:fillRect/>
+          </a:stretch>
+        </p:blipFill>
+        <p:spPr>
+          <a:xfrm>
+            <a:off x="713232" y="3090672"/>
+            <a:ext cx="292608" cy="292608"/>
+          </a:xfrm>
+          <a:prstGeom prst="rect">
+            <a:avLst/>
+          </a:prstGeom>
+        </p:spPr>
+      </p:pic>
+      <p:sp>
+        <p:nvSpPr>
+          <p:cNvPr id="8" name="TextBox 7"/>
+          <p:cNvSpPr txBox="1"/>
+          <p:nvPr/>
+        </p:nvSpPr>
+        <p:spPr>
+          <a:xfrm>
+            <a:off x="1115568" y="3108960"/>
+            <a:ext cx="4370832" cy="457200"/>
+          </a:xfrm>
+          <a:prstGeom prst="rect">
+            <a:avLst/>
+          </a:prstGeom>
+          <a:noFill/>
+        </p:spPr>
+        <p:txBody>
+          <a:bodyPr wrap="square" lIns="45720" rIns="45720" tIns="18288" bIns="18288">
+            <a:spAutoFit/>
+          </a:bodyPr>
+          <a:lstStyle/>
+          <a:p>
+            <a:pPr algn="l">
+              <a:defRPr sz="1700" b="1">
+                <a:solidFill>
+                  <a:srgbClr val="EF4444"/>
+                </a:solidFill>
+                <a:latin typeface="Calibri"/>
+              </a:defRPr>
+            </a:pPr>
+            <a:r>
+              <a:t>Sans persona (moyen)</a:t>
+            </a:r>
+          </a:p>
+        </p:txBody>
+      </p:sp>
       <p:sp>
         <p:nvSpPr>
           <p:cNvPr id="9" name="TextBox 8"/>
@@ -4366,44 +4410,8 @@
         </p:nvSpPr>
         <p:spPr>
           <a:xfrm>
-            <a:off x="6217920" y="3200400"/>
-            <a:ext cx="4663440" cy="457200"/>
-          </a:xfrm>
-          <a:prstGeom prst="rect">
-            <a:avLst/>
-          </a:prstGeom>
-          <a:noFill/>
-        </p:spPr>
-        <p:txBody>
-          <a:bodyPr wrap="square">
-            <a:spAutoFit/>
-          </a:bodyPr>
-          <a:lstStyle/>
-          <a:p>
-            <a:pPr algn="l">
-              <a:defRPr sz="1800" b="1">
-                <a:solidFill>
-                  <a:srgbClr val="10B981"/>
-                </a:solidFill>
-                <a:latin typeface="Calibri"/>
-              </a:defRPr>
-            </a:pPr>
-            <a:r>
-              <a:t>✅ Avec persona (puissant)</a:t>
-            </a:r>
-          </a:p>
-        </p:txBody>
-      </p:sp>
-      <p:sp>
-        <p:nvSpPr>
-          <p:cNvPr id="10" name="TextBox 9"/>
-          <p:cNvSpPr txBox="1"/>
-          <p:nvPr/>
-        </p:nvSpPr>
-        <p:spPr>
-          <a:xfrm>
-            <a:off x="6217920" y="3657600"/>
-            <a:ext cx="4663440" cy="2743200"/>
+            <a:off x="731520" y="3703320"/>
+            <a:ext cx="4663440" cy="2331720"/>
           </a:xfrm>
           <a:prstGeom prst="rect">
             <a:avLst/>
@@ -4428,7 +4436,7 @@
               </a:defRPr>
             </a:pPr>
             <a:r>
-              <a:t>«En tant que chef de projet senior, rédige un courriel de suivi technique»</a:t>
+              <a:t>«Rédige un courriel de suivi»</a:t>
             </a:r>
           </a:p>
           <a:p>
@@ -4457,7 +4465,297 @@
               </a:defRPr>
             </a:pPr>
             <a:r>
+              <a:t>→ Réponse générique, sans personnalité, applicable à personne</a:t>
+            </a:r>
+          </a:p>
+        </p:txBody>
+      </p:sp>
+      <p:sp>
+        <p:nvSpPr>
+          <p:cNvPr id="10" name="Rectangle 9"/>
+          <p:cNvSpPr/>
+          <p:nvPr/>
+        </p:nvSpPr>
+        <p:spPr>
+          <a:xfrm>
+            <a:off x="5943600" y="2926080"/>
+            <a:ext cx="5212080" cy="3291840"/>
+          </a:xfrm>
+          <a:prstGeom prst="rect">
+            <a:avLst/>
+          </a:prstGeom>
+          <a:solidFill>
+            <a:srgbClr val="FFFFFF"/>
+          </a:solidFill>
+          <a:ln>
+            <a:solidFill>
+              <a:srgbClr val="E0E0E0"/>
+            </a:solidFill>
+          </a:ln>
+          <a:effectLst/>
+        </p:spPr>
+        <p:style>
+          <a:lnRef idx="1">
+            <a:schemeClr val="accent1"/>
+          </a:lnRef>
+          <a:fillRef idx="3">
+            <a:schemeClr val="accent1"/>
+          </a:fillRef>
+          <a:effectRef idx="2">
+            <a:schemeClr val="accent1"/>
+          </a:effectRef>
+          <a:fontRef idx="minor">
+            <a:schemeClr val="lt1"/>
+          </a:fontRef>
+        </p:style>
+        <p:txBody>
+          <a:bodyPr rtlCol="0" anchor="ctr"/>
+          <a:lstStyle/>
+          <a:p>
+            <a:pPr algn="ctr"/>
+          </a:p>
+        </p:txBody>
+      </p:sp>
+      <p:pic>
+        <p:nvPicPr>
+          <p:cNvPr id="11" name="Picture 10" descr="user-check_00874E_30.png"/>
+          <p:cNvPicPr>
+            <a:picLocks noChangeAspect="1"/>
+          </p:cNvPicPr>
+          <p:nvPr/>
+        </p:nvPicPr>
+        <p:blipFill>
+          <a:blip r:embed="rId4"/>
+          <a:stretch>
+            <a:fillRect/>
+          </a:stretch>
+        </p:blipFill>
+        <p:spPr>
+          <a:xfrm>
+            <a:off x="6199632" y="3090672"/>
+            <a:ext cx="292608" cy="292608"/>
+          </a:xfrm>
+          <a:prstGeom prst="rect">
+            <a:avLst/>
+          </a:prstGeom>
+        </p:spPr>
+      </p:pic>
+      <p:sp>
+        <p:nvSpPr>
+          <p:cNvPr id="12" name="TextBox 11"/>
+          <p:cNvSpPr txBox="1"/>
+          <p:nvPr/>
+        </p:nvSpPr>
+        <p:spPr>
+          <a:xfrm>
+            <a:off x="6601968" y="3108960"/>
+            <a:ext cx="4370831" cy="457200"/>
+          </a:xfrm>
+          <a:prstGeom prst="rect">
+            <a:avLst/>
+          </a:prstGeom>
+          <a:noFill/>
+        </p:spPr>
+        <p:txBody>
+          <a:bodyPr wrap="square" lIns="45720" rIns="45720" tIns="18288" bIns="18288">
+            <a:spAutoFit/>
+          </a:bodyPr>
+          <a:lstStyle/>
+          <a:p>
+            <a:pPr algn="l">
+              <a:defRPr sz="1700" b="1">
+                <a:solidFill>
+                  <a:srgbClr val="00874E"/>
+                </a:solidFill>
+                <a:latin typeface="Calibri"/>
+              </a:defRPr>
+            </a:pPr>
+            <a:r>
+              <a:t>Avec persona (puissant)</a:t>
+            </a:r>
+          </a:p>
+        </p:txBody>
+      </p:sp>
+      <p:sp>
+        <p:nvSpPr>
+          <p:cNvPr id="13" name="TextBox 12"/>
+          <p:cNvSpPr txBox="1"/>
+          <p:nvPr/>
+        </p:nvSpPr>
+        <p:spPr>
+          <a:xfrm>
+            <a:off x="6217920" y="3703320"/>
+            <a:ext cx="4663440" cy="2331720"/>
+          </a:xfrm>
+          <a:prstGeom prst="rect">
+            <a:avLst/>
+          </a:prstGeom>
+          <a:noFill/>
+        </p:spPr>
+        <p:txBody>
+          <a:bodyPr wrap="square">
+            <a:spAutoFit/>
+          </a:bodyPr>
+          <a:lstStyle/>
+          <a:p>
+            <a:pPr>
+              <a:spcAft>
+                <a:spcPts val="400"/>
+              </a:spcAft>
+              <a:defRPr sz="1300">
+                <a:solidFill>
+                  <a:srgbClr val="2B2B2B"/>
+                </a:solidFill>
+                <a:latin typeface="Calibri"/>
+              </a:defRPr>
+            </a:pPr>
+            <a:r>
+              <a:t>«En tant que chef de projet senior, rédige un courriel de suivi technique»</a:t>
+            </a:r>
+          </a:p>
+          <a:p>
+            <a:pPr>
+              <a:spcAft>
+                <a:spcPts val="400"/>
+              </a:spcAft>
+              <a:defRPr sz="1300">
+                <a:solidFill>
+                  <a:srgbClr val="2B2B2B"/>
+                </a:solidFill>
+                <a:latin typeface="Calibri"/>
+              </a:defRPr>
+            </a:pPr>
+          </a:p>
+          <a:p>
+            <a:pPr>
+              <a:spcAft>
+                <a:spcPts val="400"/>
+              </a:spcAft>
+              <a:defRPr sz="1300">
+                <a:solidFill>
+                  <a:srgbClr val="2B2B2B"/>
+                </a:solidFill>
+                <a:latin typeface="Calibri"/>
+              </a:defRPr>
+            </a:pPr>
+            <a:r>
               <a:t>→ Réponse experte, ton adapté, détails pertinents</a:t>
+            </a:r>
+          </a:p>
+        </p:txBody>
+      </p:sp>
+      <p:sp>
+        <p:nvSpPr>
+          <p:cNvPr id="14" name="Rectangle 13"/>
+          <p:cNvSpPr/>
+          <p:nvPr/>
+        </p:nvSpPr>
+        <p:spPr>
+          <a:xfrm>
+            <a:off x="457200" y="6446520"/>
+            <a:ext cx="11274552" cy="13716"/>
+          </a:xfrm>
+          <a:prstGeom prst="rect">
+            <a:avLst/>
+          </a:prstGeom>
+          <a:solidFill>
+            <a:srgbClr val="00874E"/>
+          </a:solidFill>
+          <a:ln>
+            <a:noFill/>
+          </a:ln>
+          <a:effectLst/>
+        </p:spPr>
+        <p:style>
+          <a:lnRef idx="1">
+            <a:schemeClr val="accent1"/>
+          </a:lnRef>
+          <a:fillRef idx="3">
+            <a:schemeClr val="accent1"/>
+          </a:fillRef>
+          <a:effectRef idx="2">
+            <a:schemeClr val="accent1"/>
+          </a:effectRef>
+          <a:fontRef idx="minor">
+            <a:schemeClr val="lt1"/>
+          </a:fontRef>
+        </p:style>
+        <p:txBody>
+          <a:bodyPr rtlCol="0" anchor="ctr"/>
+          <a:lstStyle/>
+          <a:p>
+            <a:pPr algn="ctr"/>
+          </a:p>
+        </p:txBody>
+      </p:sp>
+      <p:sp>
+        <p:nvSpPr>
+          <p:cNvPr id="15" name="TextBox 14"/>
+          <p:cNvSpPr txBox="1"/>
+          <p:nvPr/>
+        </p:nvSpPr>
+        <p:spPr>
+          <a:xfrm>
+            <a:off x="457200" y="6537960"/>
+            <a:ext cx="5486400" cy="274320"/>
+          </a:xfrm>
+          <a:prstGeom prst="rect">
+            <a:avLst/>
+          </a:prstGeom>
+          <a:noFill/>
+        </p:spPr>
+        <p:txBody>
+          <a:bodyPr wrap="square" lIns="45720" rIns="45720" tIns="18288" bIns="18288">
+            <a:spAutoFit/>
+          </a:bodyPr>
+          <a:lstStyle/>
+          <a:p>
+            <a:pPr algn="l">
+              <a:defRPr sz="1000" b="0">
+                <a:solidFill>
+                  <a:srgbClr val="6B6B6B"/>
+                </a:solidFill>
+                <a:latin typeface="Calibri"/>
+              </a:defRPr>
+            </a:pPr>
+            <a:r>
+              <a:t>La minute Copilot</a:t>
+            </a:r>
+          </a:p>
+        </p:txBody>
+      </p:sp>
+      <p:sp>
+        <p:nvSpPr>
+          <p:cNvPr id="16" name="TextBox 15"/>
+          <p:cNvSpPr txBox="1"/>
+          <p:nvPr/>
+        </p:nvSpPr>
+        <p:spPr>
+          <a:xfrm>
+            <a:off x="10972800" y="6537960"/>
+            <a:ext cx="822960" cy="274320"/>
+          </a:xfrm>
+          <a:prstGeom prst="rect">
+            <a:avLst/>
+          </a:prstGeom>
+          <a:noFill/>
+        </p:spPr>
+        <p:txBody>
+          <a:bodyPr wrap="square" lIns="45720" rIns="45720" tIns="18288" bIns="18288">
+            <a:spAutoFit/>
+          </a:bodyPr>
+          <a:lstStyle/>
+          <a:p>
+            <a:pPr algn="r">
+              <a:defRPr sz="1000" b="0">
+                <a:solidFill>
+                  <a:srgbClr val="6B6B6B"/>
+                </a:solidFill>
+                <a:latin typeface="Calibri"/>
+              </a:defRPr>
+            </a:pPr>
+            <a:r>
+              <a:t>2</a:t>
             </a:r>
           </a:p>
         </p:txBody>
@@ -4476,7 +4774,7 @@
     <p:bg>
       <p:bgPr>
         <a:solidFill>
-          <a:srgbClr val="FFFFFF"/>
+          <a:srgbClr val="E6F0EA"/>
         </a:solidFill>
         <a:effectLst/>
       </p:bgPr>
@@ -4496,8 +4794,8 @@
         </p:nvSpPr>
         <p:spPr>
           <a:xfrm>
-            <a:off x="457200" y="274320"/>
-            <a:ext cx="10972800" cy="640080"/>
+            <a:off x="457200" y="365760"/>
+            <a:ext cx="10972800" cy="731520"/>
           </a:xfrm>
           <a:prstGeom prst="rect">
             <a:avLst/>
@@ -4505,21 +4803,21 @@
           <a:noFill/>
         </p:spPr>
         <p:txBody>
-          <a:bodyPr wrap="square">
+          <a:bodyPr wrap="square" lIns="45720" rIns="45720" tIns="18288" bIns="18288">
             <a:spAutoFit/>
           </a:bodyPr>
           <a:lstStyle/>
           <a:p>
             <a:pPr algn="l">
-              <a:defRPr sz="3200" b="1">
-                <a:solidFill>
-                  <a:srgbClr val="2B2B2B"/>
+              <a:defRPr sz="2800" b="1">
+                <a:solidFill>
+                  <a:srgbClr val="006B3F"/>
                 </a:solidFill>
                 <a:latin typeface="Calibri"/>
               </a:defRPr>
             </a:pPr>
             <a:r>
-              <a:t>📝 3 personas indispensables dans Outlook</a:t>
+              <a:t>3 personas indispensables dans Outlook</a:t>
             </a:r>
           </a:p>
         </p:txBody>
@@ -4532,8 +4830,8 @@
         </p:nvSpPr>
         <p:spPr>
           <a:xfrm>
-            <a:off x="457200" y="914400"/>
-            <a:ext cx="10972800" cy="457200"/>
+            <a:off x="457200" y="1005840"/>
+            <a:ext cx="10972800" cy="411480"/>
           </a:xfrm>
           <a:prstGeom prst="rect">
             <a:avLst/>
@@ -4541,13 +4839,13 @@
           <a:noFill/>
         </p:spPr>
         <p:txBody>
-          <a:bodyPr wrap="square">
+          <a:bodyPr wrap="square" lIns="45720" rIns="45720" tIns="18288" bIns="18288">
             <a:spAutoFit/>
           </a:bodyPr>
           <a:lstStyle/>
           <a:p>
             <a:pPr algn="l">
-              <a:defRPr sz="1800" b="0">
+              <a:defRPr sz="1500" b="0">
                 <a:solidFill>
                   <a:srgbClr val="6B6B6B"/>
                 </a:solidFill>
@@ -4562,97 +4860,25 @@
       </p:sp>
       <p:sp>
         <p:nvSpPr>
-          <p:cNvPr id="4" name="TextBox 3"/>
-          <p:cNvSpPr txBox="1"/>
-          <p:nvPr/>
-        </p:nvSpPr>
-        <p:spPr>
-          <a:xfrm>
-            <a:off x="457200" y="1554480"/>
-            <a:ext cx="10972800" cy="1371600"/>
-          </a:xfrm>
-          <a:prstGeom prst="rect">
-            <a:avLst/>
-          </a:prstGeom>
-          <a:noFill/>
-        </p:spPr>
-        <p:txBody>
-          <a:bodyPr wrap="square">
-            <a:spAutoFit/>
-          </a:bodyPr>
-          <a:lstStyle/>
-          <a:p>
-            <a:pPr>
-              <a:spcAft>
-                <a:spcPts val="400"/>
-              </a:spcAft>
-              <a:defRPr sz="1400">
-                <a:solidFill>
-                  <a:srgbClr val="2B2B2B"/>
-                </a:solidFill>
-                <a:latin typeface="Calibri"/>
-              </a:defRPr>
-            </a:pPr>
-            <a:r>
-              <a:t>• Ajoutez le persona au début du prompt</a:t>
-            </a:r>
-          </a:p>
-          <a:p>
-            <a:pPr>
-              <a:spcAft>
-                <a:spcPts val="400"/>
-              </a:spcAft>
-              <a:defRPr sz="1400">
-                <a:solidFill>
-                  <a:srgbClr val="2B2B2B"/>
-                </a:solidFill>
-                <a:latin typeface="Calibri"/>
-              </a:defRPr>
-            </a:pPr>
-            <a:r>
-              <a:t>• Copilot garde le contexte</a:t>
-            </a:r>
-          </a:p>
-          <a:p>
-            <a:pPr>
-              <a:spcAft>
-                <a:spcPts val="400"/>
-              </a:spcAft>
-              <a:defRPr sz="1400">
-                <a:solidFill>
-                  <a:srgbClr val="2B2B2B"/>
-                </a:solidFill>
-                <a:latin typeface="Calibri"/>
-              </a:defRPr>
-            </a:pPr>
-            <a:r>
-              <a:t>• Combinez persona + consigne + format</a:t>
-            </a:r>
-          </a:p>
-        </p:txBody>
-      </p:sp>
-      <p:sp>
-        <p:nvSpPr>
-          <p:cNvPr id="5" name="Rectangle 4"/>
+          <p:cNvPr id="4" name="Rectangle 3"/>
           <p:cNvSpPr/>
           <p:nvPr/>
         </p:nvSpPr>
         <p:spPr>
           <a:xfrm>
-            <a:off x="457200" y="3017520"/>
-            <a:ext cx="3383280" cy="3657600"/>
+            <a:off x="457200" y="1508760"/>
+            <a:ext cx="11274552" cy="18288"/>
           </a:xfrm>
           <a:prstGeom prst="rect">
             <a:avLst/>
           </a:prstGeom>
           <a:solidFill>
-            <a:srgbClr val="FFFFFF"/>
+            <a:srgbClr val="00874E"/>
           </a:solidFill>
           <a:ln>
-            <a:solidFill>
-              <a:srgbClr val="E0E0E0"/>
-            </a:solidFill>
+            <a:noFill/>
           </a:ln>
+          <a:effectLst/>
         </p:spPr>
         <p:style>
           <a:lnRef idx="1">
@@ -4678,50 +4904,14 @@
       </p:sp>
       <p:sp>
         <p:nvSpPr>
-          <p:cNvPr id="6" name="TextBox 5"/>
+          <p:cNvPr id="5" name="TextBox 4"/>
           <p:cNvSpPr txBox="1"/>
           <p:nvPr/>
         </p:nvSpPr>
         <p:spPr>
           <a:xfrm>
-            <a:off x="731520" y="3200400"/>
-            <a:ext cx="2834640" cy="457200"/>
-          </a:xfrm>
-          <a:prstGeom prst="rect">
-            <a:avLst/>
-          </a:prstGeom>
-          <a:noFill/>
-        </p:spPr>
-        <p:txBody>
-          <a:bodyPr wrap="square">
-            <a:spAutoFit/>
-          </a:bodyPr>
-          <a:lstStyle/>
-          <a:p>
-            <a:pPr algn="l">
-              <a:defRPr sz="1800" b="1">
-                <a:solidFill>
-                  <a:srgbClr val="0078D4"/>
-                </a:solidFill>
-                <a:latin typeface="Calibri"/>
-              </a:defRPr>
-            </a:pPr>
-            <a:r>
-              <a:t>👔 Persona professionnel</a:t>
-            </a:r>
-          </a:p>
-        </p:txBody>
-      </p:sp>
-      <p:sp>
-        <p:nvSpPr>
-          <p:cNvPr id="7" name="TextBox 6"/>
-          <p:cNvSpPr txBox="1"/>
-          <p:nvPr/>
-        </p:nvSpPr>
-        <p:spPr>
-          <a:xfrm>
-            <a:off x="731520" y="3657600"/>
-            <a:ext cx="2834640" cy="2743200"/>
+            <a:off x="457200" y="1737360"/>
+            <a:ext cx="10972800" cy="1188720"/>
           </a:xfrm>
           <a:prstGeom prst="rect">
             <a:avLst/>
@@ -4738,7 +4928,7 @@
               <a:spcAft>
                 <a:spcPts val="400"/>
               </a:spcAft>
-              <a:defRPr sz="1300">
+              <a:defRPr sz="1400">
                 <a:solidFill>
                   <a:srgbClr val="2B2B2B"/>
                 </a:solidFill>
@@ -4746,7 +4936,7 @@
               </a:defRPr>
             </a:pPr>
             <a:r>
-              <a:t>«En tant que directeur général, réponds à un partenaire d'affaires. Ton formel mais pas froid.»</a:t>
+              <a:t>• Ajoutez le persona au début du prompt</a:t>
             </a:r>
           </a:p>
           <a:p>
@@ -4754,20 +4944,23 @@
               <a:spcAft>
                 <a:spcPts val="400"/>
               </a:spcAft>
-              <a:defRPr sz="1300">
+              <a:defRPr sz="1400">
                 <a:solidFill>
                   <a:srgbClr val="2B2B2B"/>
                 </a:solidFill>
                 <a:latin typeface="Calibri"/>
               </a:defRPr>
             </a:pPr>
+            <a:r>
+              <a:t>• Copilot garde le contexte</a:t>
+            </a:r>
           </a:p>
           <a:p>
             <a:pPr>
               <a:spcAft>
                 <a:spcPts val="400"/>
               </a:spcAft>
-              <a:defRPr sz="1300">
+              <a:defRPr sz="1400">
                 <a:solidFill>
                   <a:srgbClr val="2B2B2B"/>
                 </a:solidFill>
@@ -4775,21 +4968,21 @@
               </a:defRPr>
             </a:pPr>
             <a:r>
-              <a:t>✅ Parfait pour clients et partenaires</a:t>
-            </a:r>
-          </a:p>
-        </p:txBody>
-      </p:sp>
-      <p:sp>
-        <p:nvSpPr>
-          <p:cNvPr id="8" name="Rectangle 7"/>
+              <a:t>• Combinez persona + consigne + format</a:t>
+            </a:r>
+          </a:p>
+        </p:txBody>
+      </p:sp>
+      <p:sp>
+        <p:nvSpPr>
+          <p:cNvPr id="6" name="Rectangle 5"/>
           <p:cNvSpPr/>
           <p:nvPr/>
         </p:nvSpPr>
         <p:spPr>
           <a:xfrm>
-            <a:off x="4114800" y="3017520"/>
-            <a:ext cx="3383280" cy="3657600"/>
+            <a:off x="457200" y="2926080"/>
+            <a:ext cx="3383280" cy="3291840"/>
           </a:xfrm>
           <a:prstGeom prst="rect">
             <a:avLst/>
@@ -4802,6 +4995,7 @@
               <a:srgbClr val="E0E0E0"/>
             </a:solidFill>
           </a:ln>
+          <a:effectLst/>
         </p:spPr>
         <p:style>
           <a:lnRef idx="1">
@@ -4825,6 +5019,66 @@
           </a:p>
         </p:txBody>
       </p:sp>
+      <p:pic>
+        <p:nvPicPr>
+          <p:cNvPr id="7" name="Picture 6" descr="briefcase_00874E_30.png"/>
+          <p:cNvPicPr>
+            <a:picLocks noChangeAspect="1"/>
+          </p:cNvPicPr>
+          <p:nvPr/>
+        </p:nvPicPr>
+        <p:blipFill>
+          <a:blip r:embed="rId3"/>
+          <a:stretch>
+            <a:fillRect/>
+          </a:stretch>
+        </p:blipFill>
+        <p:spPr>
+          <a:xfrm>
+            <a:off x="713232" y="3090672"/>
+            <a:ext cx="292608" cy="292608"/>
+          </a:xfrm>
+          <a:prstGeom prst="rect">
+            <a:avLst/>
+          </a:prstGeom>
+        </p:spPr>
+      </p:pic>
+      <p:sp>
+        <p:nvSpPr>
+          <p:cNvPr id="8" name="TextBox 7"/>
+          <p:cNvSpPr txBox="1"/>
+          <p:nvPr/>
+        </p:nvSpPr>
+        <p:spPr>
+          <a:xfrm>
+            <a:off x="1115568" y="3108960"/>
+            <a:ext cx="2542032" cy="457200"/>
+          </a:xfrm>
+          <a:prstGeom prst="rect">
+            <a:avLst/>
+          </a:prstGeom>
+          <a:noFill/>
+        </p:spPr>
+        <p:txBody>
+          <a:bodyPr wrap="square" lIns="45720" rIns="45720" tIns="18288" bIns="18288">
+            <a:spAutoFit/>
+          </a:bodyPr>
+          <a:lstStyle/>
+          <a:p>
+            <a:pPr algn="l">
+              <a:defRPr sz="1700" b="1">
+                <a:solidFill>
+                  <a:srgbClr val="00874E"/>
+                </a:solidFill>
+                <a:latin typeface="Calibri"/>
+              </a:defRPr>
+            </a:pPr>
+            <a:r>
+              <a:t>Persona professionnel</a:t>
+            </a:r>
+          </a:p>
+        </p:txBody>
+      </p:sp>
       <p:sp>
         <p:nvSpPr>
           <p:cNvPr id="9" name="TextBox 8"/>
@@ -4833,44 +5087,8 @@
         </p:nvSpPr>
         <p:spPr>
           <a:xfrm>
-            <a:off x="4389120" y="3200400"/>
-            <a:ext cx="2834640" cy="457200"/>
-          </a:xfrm>
-          <a:prstGeom prst="rect">
-            <a:avLst/>
-          </a:prstGeom>
-          <a:noFill/>
-        </p:spPr>
-        <p:txBody>
-          <a:bodyPr wrap="square">
-            <a:spAutoFit/>
-          </a:bodyPr>
-          <a:lstStyle/>
-          <a:p>
-            <a:pPr algn="l">
-              <a:defRPr sz="1800" b="1">
-                <a:solidFill>
-                  <a:srgbClr val="10B981"/>
-                </a:solidFill>
-                <a:latin typeface="Calibri"/>
-              </a:defRPr>
-            </a:pPr>
-            <a:r>
-              <a:t>🤝 Persona collaborateur</a:t>
-            </a:r>
-          </a:p>
-        </p:txBody>
-      </p:sp>
-      <p:sp>
-        <p:nvSpPr>
-          <p:cNvPr id="10" name="TextBox 9"/>
-          <p:cNvSpPr txBox="1"/>
-          <p:nvPr/>
-        </p:nvSpPr>
-        <p:spPr>
-          <a:xfrm>
-            <a:off x="4389120" y="3657600"/>
-            <a:ext cx="2834640" cy="2743200"/>
+            <a:off x="731520" y="3703320"/>
+            <a:ext cx="2834640" cy="2331720"/>
           </a:xfrm>
           <a:prstGeom prst="rect">
             <a:avLst/>
@@ -4895,7 +5113,7 @@
               </a:defRPr>
             </a:pPr>
             <a:r>
-              <a:t>«En tant que collègue, écris à mon équipe. On se tutoie. Sois direct et amical.»</a:t>
+              <a:t>«En tant que directeur général, réponds à un partenaire d'affaires. Ton formel mais pas froid.»</a:t>
             </a:r>
           </a:p>
           <a:p>
@@ -4924,21 +5142,21 @@
               </a:defRPr>
             </a:pPr>
             <a:r>
-              <a:t>✅ Parfait pour interne</a:t>
-            </a:r>
-          </a:p>
-        </p:txBody>
-      </p:sp>
-      <p:sp>
-        <p:nvSpPr>
-          <p:cNvPr id="11" name="Rectangle 10"/>
+              <a:t>Parfait pour clients et partenaires</a:t>
+            </a:r>
+          </a:p>
+        </p:txBody>
+      </p:sp>
+      <p:sp>
+        <p:nvSpPr>
+          <p:cNvPr id="10" name="Rectangle 9"/>
           <p:cNvSpPr/>
           <p:nvPr/>
         </p:nvSpPr>
         <p:spPr>
           <a:xfrm>
-            <a:off x="7772400" y="3017520"/>
-            <a:ext cx="3383280" cy="3657600"/>
+            <a:off x="4114800" y="2926080"/>
+            <a:ext cx="3383280" cy="3291840"/>
           </a:xfrm>
           <a:prstGeom prst="rect">
             <a:avLst/>
@@ -4951,6 +5169,7 @@
               <a:srgbClr val="E0E0E0"/>
             </a:solidFill>
           </a:ln>
+          <a:effectLst/>
         </p:spPr>
         <p:style>
           <a:lnRef idx="1">
@@ -4974,6 +5193,30 @@
           </a:p>
         </p:txBody>
       </p:sp>
+      <p:pic>
+        <p:nvPicPr>
+          <p:cNvPr id="11" name="Picture 10" descr="users_00874E_30.png"/>
+          <p:cNvPicPr>
+            <a:picLocks noChangeAspect="1"/>
+          </p:cNvPicPr>
+          <p:nvPr/>
+        </p:nvPicPr>
+        <p:blipFill>
+          <a:blip r:embed="rId4"/>
+          <a:stretch>
+            <a:fillRect/>
+          </a:stretch>
+        </p:blipFill>
+        <p:spPr>
+          <a:xfrm>
+            <a:off x="4370832" y="3090672"/>
+            <a:ext cx="292608" cy="292608"/>
+          </a:xfrm>
+          <a:prstGeom prst="rect">
+            <a:avLst/>
+          </a:prstGeom>
+        </p:spPr>
+      </p:pic>
       <p:sp>
         <p:nvSpPr>
           <p:cNvPr id="12" name="TextBox 11"/>
@@ -4982,8 +5225,8 @@
         </p:nvSpPr>
         <p:spPr>
           <a:xfrm>
-            <a:off x="8046720" y="3200400"/>
-            <a:ext cx="2834640" cy="457200"/>
+            <a:off x="4773168" y="3108960"/>
+            <a:ext cx="2542031" cy="457200"/>
           </a:xfrm>
           <a:prstGeom prst="rect">
             <a:avLst/>
@@ -4991,21 +5234,21 @@
           <a:noFill/>
         </p:spPr>
         <p:txBody>
-          <a:bodyPr wrap="square">
+          <a:bodyPr wrap="square" lIns="45720" rIns="45720" tIns="18288" bIns="18288">
             <a:spAutoFit/>
           </a:bodyPr>
           <a:lstStyle/>
           <a:p>
             <a:pPr algn="l">
-              <a:defRPr sz="1800" b="1">
-                <a:solidFill>
-                  <a:srgbClr val="F59E0B"/>
+              <a:defRPr sz="1700" b="1">
+                <a:solidFill>
+                  <a:srgbClr val="00874E"/>
                 </a:solidFill>
                 <a:latin typeface="Calibri"/>
               </a:defRPr>
             </a:pPr>
             <a:r>
-              <a:t>🎓 Persona vulgarisateur</a:t>
+              <a:t>Persona collaborateur</a:t>
             </a:r>
           </a:p>
         </p:txBody>
@@ -5018,8 +5261,8 @@
         </p:nvSpPr>
         <p:spPr>
           <a:xfrm>
-            <a:off x="8046720" y="3657600"/>
-            <a:ext cx="2834640" cy="2743200"/>
+            <a:off x="4389120" y="3703320"/>
+            <a:ext cx="2834640" cy="2331720"/>
           </a:xfrm>
           <a:prstGeom prst="rect">
             <a:avLst/>
@@ -5044,7 +5287,7 @@
               </a:defRPr>
             </a:pPr>
             <a:r>
-              <a:t>«En tant que formateur, explique ce concept technique simplement. Pas de jargon.»</a:t>
+              <a:t>«En tant que collègue, écris à mon équipe. On se tutoie. Sois direct et amical.»</a:t>
             </a:r>
           </a:p>
           <a:p>
@@ -5073,7 +5316,297 @@
               </a:defRPr>
             </a:pPr>
             <a:r>
-              <a:t>✅ Parfait pour IT vers non-IT</a:t>
+              <a:t>Parfait pour interne</a:t>
+            </a:r>
+          </a:p>
+        </p:txBody>
+      </p:sp>
+      <p:sp>
+        <p:nvSpPr>
+          <p:cNvPr id="14" name="Rectangle 13"/>
+          <p:cNvSpPr/>
+          <p:nvPr/>
+        </p:nvSpPr>
+        <p:spPr>
+          <a:xfrm>
+            <a:off x="7772400" y="2926080"/>
+            <a:ext cx="3383280" cy="3291840"/>
+          </a:xfrm>
+          <a:prstGeom prst="rect">
+            <a:avLst/>
+          </a:prstGeom>
+          <a:solidFill>
+            <a:srgbClr val="FFFFFF"/>
+          </a:solidFill>
+          <a:ln>
+            <a:solidFill>
+              <a:srgbClr val="E0E0E0"/>
+            </a:solidFill>
+          </a:ln>
+          <a:effectLst/>
+        </p:spPr>
+        <p:style>
+          <a:lnRef idx="1">
+            <a:schemeClr val="accent1"/>
+          </a:lnRef>
+          <a:fillRef idx="3">
+            <a:schemeClr val="accent1"/>
+          </a:fillRef>
+          <a:effectRef idx="2">
+            <a:schemeClr val="accent1"/>
+          </a:effectRef>
+          <a:fontRef idx="minor">
+            <a:schemeClr val="lt1"/>
+          </a:fontRef>
+        </p:style>
+        <p:txBody>
+          <a:bodyPr rtlCol="0" anchor="ctr"/>
+          <a:lstStyle/>
+          <a:p>
+            <a:pPr algn="ctr"/>
+          </a:p>
+        </p:txBody>
+      </p:sp>
+      <p:pic>
+        <p:nvPicPr>
+          <p:cNvPr id="15" name="Picture 14" descr="graduation-cap_F59E0B_30.png"/>
+          <p:cNvPicPr>
+            <a:picLocks noChangeAspect="1"/>
+          </p:cNvPicPr>
+          <p:nvPr/>
+        </p:nvPicPr>
+        <p:blipFill>
+          <a:blip r:embed="rId5"/>
+          <a:stretch>
+            <a:fillRect/>
+          </a:stretch>
+        </p:blipFill>
+        <p:spPr>
+          <a:xfrm>
+            <a:off x="8028431" y="3090672"/>
+            <a:ext cx="292608" cy="292608"/>
+          </a:xfrm>
+          <a:prstGeom prst="rect">
+            <a:avLst/>
+          </a:prstGeom>
+        </p:spPr>
+      </p:pic>
+      <p:sp>
+        <p:nvSpPr>
+          <p:cNvPr id="16" name="TextBox 15"/>
+          <p:cNvSpPr txBox="1"/>
+          <p:nvPr/>
+        </p:nvSpPr>
+        <p:spPr>
+          <a:xfrm>
+            <a:off x="8430767" y="3108960"/>
+            <a:ext cx="2542032" cy="457200"/>
+          </a:xfrm>
+          <a:prstGeom prst="rect">
+            <a:avLst/>
+          </a:prstGeom>
+          <a:noFill/>
+        </p:spPr>
+        <p:txBody>
+          <a:bodyPr wrap="square" lIns="45720" rIns="45720" tIns="18288" bIns="18288">
+            <a:spAutoFit/>
+          </a:bodyPr>
+          <a:lstStyle/>
+          <a:p>
+            <a:pPr algn="l">
+              <a:defRPr sz="1700" b="1">
+                <a:solidFill>
+                  <a:srgbClr val="F59E0B"/>
+                </a:solidFill>
+                <a:latin typeface="Calibri"/>
+              </a:defRPr>
+            </a:pPr>
+            <a:r>
+              <a:t>Persona vulgarisateur</a:t>
+            </a:r>
+          </a:p>
+        </p:txBody>
+      </p:sp>
+      <p:sp>
+        <p:nvSpPr>
+          <p:cNvPr id="17" name="TextBox 16"/>
+          <p:cNvSpPr txBox="1"/>
+          <p:nvPr/>
+        </p:nvSpPr>
+        <p:spPr>
+          <a:xfrm>
+            <a:off x="8046720" y="3703320"/>
+            <a:ext cx="2834640" cy="2331720"/>
+          </a:xfrm>
+          <a:prstGeom prst="rect">
+            <a:avLst/>
+          </a:prstGeom>
+          <a:noFill/>
+        </p:spPr>
+        <p:txBody>
+          <a:bodyPr wrap="square">
+            <a:spAutoFit/>
+          </a:bodyPr>
+          <a:lstStyle/>
+          <a:p>
+            <a:pPr>
+              <a:spcAft>
+                <a:spcPts val="400"/>
+              </a:spcAft>
+              <a:defRPr sz="1300">
+                <a:solidFill>
+                  <a:srgbClr val="2B2B2B"/>
+                </a:solidFill>
+                <a:latin typeface="Calibri"/>
+              </a:defRPr>
+            </a:pPr>
+            <a:r>
+              <a:t>«En tant que formateur, explique ce concept technique simplement. Pas de jargon.»</a:t>
+            </a:r>
+          </a:p>
+          <a:p>
+            <a:pPr>
+              <a:spcAft>
+                <a:spcPts val="400"/>
+              </a:spcAft>
+              <a:defRPr sz="1300">
+                <a:solidFill>
+                  <a:srgbClr val="2B2B2B"/>
+                </a:solidFill>
+                <a:latin typeface="Calibri"/>
+              </a:defRPr>
+            </a:pPr>
+          </a:p>
+          <a:p>
+            <a:pPr>
+              <a:spcAft>
+                <a:spcPts val="400"/>
+              </a:spcAft>
+              <a:defRPr sz="1300">
+                <a:solidFill>
+                  <a:srgbClr val="2B2B2B"/>
+                </a:solidFill>
+                <a:latin typeface="Calibri"/>
+              </a:defRPr>
+            </a:pPr>
+            <a:r>
+              <a:t>Parfait pour IT vers non-IT</a:t>
+            </a:r>
+          </a:p>
+        </p:txBody>
+      </p:sp>
+      <p:sp>
+        <p:nvSpPr>
+          <p:cNvPr id="18" name="Rectangle 17"/>
+          <p:cNvSpPr/>
+          <p:nvPr/>
+        </p:nvSpPr>
+        <p:spPr>
+          <a:xfrm>
+            <a:off x="457200" y="6446520"/>
+            <a:ext cx="11274552" cy="13716"/>
+          </a:xfrm>
+          <a:prstGeom prst="rect">
+            <a:avLst/>
+          </a:prstGeom>
+          <a:solidFill>
+            <a:srgbClr val="00874E"/>
+          </a:solidFill>
+          <a:ln>
+            <a:noFill/>
+          </a:ln>
+          <a:effectLst/>
+        </p:spPr>
+        <p:style>
+          <a:lnRef idx="1">
+            <a:schemeClr val="accent1"/>
+          </a:lnRef>
+          <a:fillRef idx="3">
+            <a:schemeClr val="accent1"/>
+          </a:fillRef>
+          <a:effectRef idx="2">
+            <a:schemeClr val="accent1"/>
+          </a:effectRef>
+          <a:fontRef idx="minor">
+            <a:schemeClr val="lt1"/>
+          </a:fontRef>
+        </p:style>
+        <p:txBody>
+          <a:bodyPr rtlCol="0" anchor="ctr"/>
+          <a:lstStyle/>
+          <a:p>
+            <a:pPr algn="ctr"/>
+          </a:p>
+        </p:txBody>
+      </p:sp>
+      <p:sp>
+        <p:nvSpPr>
+          <p:cNvPr id="19" name="TextBox 18"/>
+          <p:cNvSpPr txBox="1"/>
+          <p:nvPr/>
+        </p:nvSpPr>
+        <p:spPr>
+          <a:xfrm>
+            <a:off x="457200" y="6537960"/>
+            <a:ext cx="5486400" cy="274320"/>
+          </a:xfrm>
+          <a:prstGeom prst="rect">
+            <a:avLst/>
+          </a:prstGeom>
+          <a:noFill/>
+        </p:spPr>
+        <p:txBody>
+          <a:bodyPr wrap="square" lIns="45720" rIns="45720" tIns="18288" bIns="18288">
+            <a:spAutoFit/>
+          </a:bodyPr>
+          <a:lstStyle/>
+          <a:p>
+            <a:pPr algn="l">
+              <a:defRPr sz="1000" b="0">
+                <a:solidFill>
+                  <a:srgbClr val="6B6B6B"/>
+                </a:solidFill>
+                <a:latin typeface="Calibri"/>
+              </a:defRPr>
+            </a:pPr>
+            <a:r>
+              <a:t>La minute Copilot</a:t>
+            </a:r>
+          </a:p>
+        </p:txBody>
+      </p:sp>
+      <p:sp>
+        <p:nvSpPr>
+          <p:cNvPr id="20" name="TextBox 19"/>
+          <p:cNvSpPr txBox="1"/>
+          <p:nvPr/>
+        </p:nvSpPr>
+        <p:spPr>
+          <a:xfrm>
+            <a:off x="10972800" y="6537960"/>
+            <a:ext cx="822960" cy="274320"/>
+          </a:xfrm>
+          <a:prstGeom prst="rect">
+            <a:avLst/>
+          </a:prstGeom>
+          <a:noFill/>
+        </p:spPr>
+        <p:txBody>
+          <a:bodyPr wrap="square" lIns="45720" rIns="45720" tIns="18288" bIns="18288">
+            <a:spAutoFit/>
+          </a:bodyPr>
+          <a:lstStyle/>
+          <a:p>
+            <a:pPr algn="r">
+              <a:defRPr sz="1000" b="0">
+                <a:solidFill>
+                  <a:srgbClr val="6B6B6B"/>
+                </a:solidFill>
+                <a:latin typeface="Calibri"/>
+              </a:defRPr>
+            </a:pPr>
+            <a:r>
+              <a:t>3</a:t>
             </a:r>
           </a:p>
         </p:txBody>
@@ -5092,7 +5625,7 @@
     <p:bg>
       <p:bgPr>
         <a:solidFill>
-          <a:srgbClr val="F0F4F8"/>
+          <a:srgbClr val="E6F0EA"/>
         </a:solidFill>
         <a:effectLst/>
       </p:bgPr>
@@ -5112,8 +5645,8 @@
         </p:nvSpPr>
         <p:spPr>
           <a:xfrm>
-            <a:off x="457200" y="274320"/>
-            <a:ext cx="10972800" cy="640080"/>
+            <a:off x="457200" y="365760"/>
+            <a:ext cx="10972800" cy="731520"/>
           </a:xfrm>
           <a:prstGeom prst="rect">
             <a:avLst/>
@@ -5121,21 +5654,21 @@
           <a:noFill/>
         </p:spPr>
         <p:txBody>
-          <a:bodyPr wrap="square">
+          <a:bodyPr wrap="square" lIns="45720" rIns="45720" tIns="18288" bIns="18288">
             <a:spAutoFit/>
           </a:bodyPr>
           <a:lstStyle/>
           <a:p>
             <a:pPr algn="l">
-              <a:defRPr sz="3200" b="1">
-                <a:solidFill>
-                  <a:srgbClr val="2B2B2B"/>
+              <a:defRPr sz="2800" b="1">
+                <a:solidFill>
+                  <a:srgbClr val="006B3F"/>
                 </a:solidFill>
                 <a:latin typeface="Calibri"/>
               </a:defRPr>
             </a:pPr>
             <a:r>
-              <a:t>💡 Exemples concrets — Avant / Après</a:t>
+              <a:t>Exemples concrets — Avant / Après</a:t>
             </a:r>
           </a:p>
         </p:txBody>
@@ -5148,20 +5681,19 @@
         </p:nvSpPr>
         <p:spPr>
           <a:xfrm>
-            <a:off x="457200" y="1188720"/>
-            <a:ext cx="5212080" cy="5029200"/>
+            <a:off x="457200" y="1234440"/>
+            <a:ext cx="11274552" cy="18288"/>
           </a:xfrm>
           <a:prstGeom prst="rect">
             <a:avLst/>
           </a:prstGeom>
           <a:solidFill>
-            <a:srgbClr val="FFFFFF"/>
+            <a:srgbClr val="00874E"/>
           </a:solidFill>
           <a:ln>
-            <a:solidFill>
-              <a:srgbClr val="E0E0E0"/>
-            </a:solidFill>
+            <a:noFill/>
           </a:ln>
+          <a:effectLst/>
         </p:spPr>
         <p:style>
           <a:lnRef idx="1">
@@ -5187,118 +5719,14 @@
       </p:sp>
       <p:sp>
         <p:nvSpPr>
-          <p:cNvPr id="4" name="TextBox 3"/>
-          <p:cNvSpPr txBox="1"/>
-          <p:nvPr/>
-        </p:nvSpPr>
-        <p:spPr>
-          <a:xfrm>
-            <a:off x="731520" y="1371600"/>
-            <a:ext cx="4663440" cy="457200"/>
-          </a:xfrm>
-          <a:prstGeom prst="rect">
-            <a:avLst/>
-          </a:prstGeom>
-          <a:noFill/>
-        </p:spPr>
-        <p:txBody>
-          <a:bodyPr wrap="square">
-            <a:spAutoFit/>
-          </a:bodyPr>
-          <a:lstStyle/>
-          <a:p>
-            <a:pPr algn="l">
-              <a:defRPr sz="1800" b="1">
-                <a:solidFill>
-                  <a:srgbClr val="EF4444"/>
-                </a:solidFill>
-                <a:latin typeface="Calibri"/>
-              </a:defRPr>
-            </a:pPr>
-            <a:r>
-              <a:t>❌ AVANT — Sans persona</a:t>
-            </a:r>
-          </a:p>
-        </p:txBody>
-      </p:sp>
-      <p:sp>
-        <p:nvSpPr>
-          <p:cNvPr id="5" name="TextBox 4"/>
-          <p:cNvSpPr txBox="1"/>
-          <p:nvPr/>
-        </p:nvSpPr>
-        <p:spPr>
-          <a:xfrm>
-            <a:off x="731520" y="1828800"/>
-            <a:ext cx="4663440" cy="4114800"/>
-          </a:xfrm>
-          <a:prstGeom prst="rect">
-            <a:avLst/>
-          </a:prstGeom>
-          <a:noFill/>
-        </p:spPr>
-        <p:txBody>
-          <a:bodyPr wrap="square">
-            <a:spAutoFit/>
-          </a:bodyPr>
-          <a:lstStyle/>
-          <a:p>
-            <a:pPr>
-              <a:spcAft>
-                <a:spcPts val="400"/>
-              </a:spcAft>
-              <a:defRPr sz="1300">
-                <a:solidFill>
-                  <a:srgbClr val="2B2B2B"/>
-                </a:solidFill>
-                <a:latin typeface="Calibri"/>
-              </a:defRPr>
-            </a:pPr>
-            <a:r>
-              <a:t>«Draft a reply to this email»</a:t>
-            </a:r>
-          </a:p>
-          <a:p>
-            <a:pPr>
-              <a:spcAft>
-                <a:spcPts val="400"/>
-              </a:spcAft>
-              <a:defRPr sz="1300">
-                <a:solidFill>
-                  <a:srgbClr val="2B2B2B"/>
-                </a:solidFill>
-                <a:latin typeface="Calibri"/>
-              </a:defRPr>
-            </a:pPr>
-          </a:p>
-          <a:p>
-            <a:pPr>
-              <a:spcAft>
-                <a:spcPts val="400"/>
-              </a:spcAft>
-              <a:defRPr sz="1300">
-                <a:solidFill>
-                  <a:srgbClr val="2B2B2B"/>
-                </a:solidFill>
-                <a:latin typeface="Calibri"/>
-              </a:defRPr>
-            </a:pPr>
-            <a:r>
-              <a:t>→ Réponse générique, sans contexte. Temps perdu à réécrire.</a:t>
-            </a:r>
-          </a:p>
-        </p:txBody>
-      </p:sp>
-      <p:sp>
-        <p:nvSpPr>
-          <p:cNvPr id="6" name="Rectangle 5"/>
+          <p:cNvPr id="4" name="Rectangle 3"/>
           <p:cNvSpPr/>
           <p:nvPr/>
         </p:nvSpPr>
         <p:spPr>
           <a:xfrm>
-            <a:off x="5943600" y="1188720"/>
-            <a:ext cx="5212080" cy="5029200"/>
+            <a:off x="457200" y="1463040"/>
+            <a:ext cx="5212080" cy="4754880"/>
           </a:xfrm>
           <a:prstGeom prst="rect">
             <a:avLst/>
@@ -5311,6 +5739,7 @@
               <a:srgbClr val="E0E0E0"/>
             </a:solidFill>
           </a:ln>
+          <a:effectLst/>
         </p:spPr>
         <p:style>
           <a:lnRef idx="1">
@@ -5334,6 +5763,66 @@
           </a:p>
         </p:txBody>
       </p:sp>
+      <p:pic>
+        <p:nvPicPr>
+          <p:cNvPr id="5" name="Picture 4" descr="circle-x_EF4444_30.png"/>
+          <p:cNvPicPr>
+            <a:picLocks noChangeAspect="1"/>
+          </p:cNvPicPr>
+          <p:nvPr/>
+        </p:nvPicPr>
+        <p:blipFill>
+          <a:blip r:embed="rId3"/>
+          <a:stretch>
+            <a:fillRect/>
+          </a:stretch>
+        </p:blipFill>
+        <p:spPr>
+          <a:xfrm>
+            <a:off x="713232" y="1627632"/>
+            <a:ext cx="292608" cy="292608"/>
+          </a:xfrm>
+          <a:prstGeom prst="rect">
+            <a:avLst/>
+          </a:prstGeom>
+        </p:spPr>
+      </p:pic>
+      <p:sp>
+        <p:nvSpPr>
+          <p:cNvPr id="6" name="TextBox 5"/>
+          <p:cNvSpPr txBox="1"/>
+          <p:nvPr/>
+        </p:nvSpPr>
+        <p:spPr>
+          <a:xfrm>
+            <a:off x="1115568" y="1645920"/>
+            <a:ext cx="4370832" cy="457200"/>
+          </a:xfrm>
+          <a:prstGeom prst="rect">
+            <a:avLst/>
+          </a:prstGeom>
+          <a:noFill/>
+        </p:spPr>
+        <p:txBody>
+          <a:bodyPr wrap="square" lIns="45720" rIns="45720" tIns="18288" bIns="18288">
+            <a:spAutoFit/>
+          </a:bodyPr>
+          <a:lstStyle/>
+          <a:p>
+            <a:pPr algn="l">
+              <a:defRPr sz="1700" b="1">
+                <a:solidFill>
+                  <a:srgbClr val="EF4444"/>
+                </a:solidFill>
+                <a:latin typeface="Calibri"/>
+              </a:defRPr>
+            </a:pPr>
+            <a:r>
+              <a:t>AVANT — Sans persona</a:t>
+            </a:r>
+          </a:p>
+        </p:txBody>
+      </p:sp>
       <p:sp>
         <p:nvSpPr>
           <p:cNvPr id="7" name="TextBox 6"/>
@@ -5342,44 +5831,8 @@
         </p:nvSpPr>
         <p:spPr>
           <a:xfrm>
-            <a:off x="6217920" y="1371600"/>
-            <a:ext cx="4663440" cy="457200"/>
-          </a:xfrm>
-          <a:prstGeom prst="rect">
-            <a:avLst/>
-          </a:prstGeom>
-          <a:noFill/>
-        </p:spPr>
-        <p:txBody>
-          <a:bodyPr wrap="square">
-            <a:spAutoFit/>
-          </a:bodyPr>
-          <a:lstStyle/>
-          <a:p>
-            <a:pPr algn="l">
-              <a:defRPr sz="1800" b="1">
-                <a:solidFill>
-                  <a:srgbClr val="10B981"/>
-                </a:solidFill>
-                <a:latin typeface="Calibri"/>
-              </a:defRPr>
-            </a:pPr>
-            <a:r>
-              <a:t>✅ APRÈS — Avec persona</a:t>
-            </a:r>
-          </a:p>
-        </p:txBody>
-      </p:sp>
-      <p:sp>
-        <p:nvSpPr>
-          <p:cNvPr id="8" name="TextBox 7"/>
-          <p:cNvSpPr txBox="1"/>
-          <p:nvPr/>
-        </p:nvSpPr>
-        <p:spPr>
-          <a:xfrm>
-            <a:off x="6217920" y="1828800"/>
-            <a:ext cx="4663440" cy="4114800"/>
+            <a:off x="731520" y="2240280"/>
+            <a:ext cx="4663440" cy="3794760"/>
           </a:xfrm>
           <a:prstGeom prst="rect">
             <a:avLst/>
@@ -5404,7 +5857,7 @@
               </a:defRPr>
             </a:pPr>
             <a:r>
-              <a:t>«As a senior project manager, draft a reply to this stakeholder. Propose a timeline.»</a:t>
+              <a:t>«Draft a reply to this email»</a:t>
             </a:r>
           </a:p>
           <a:p>
@@ -5433,7 +5886,297 @@
               </a:defRPr>
             </a:pPr>
             <a:r>
+              <a:t>→ Réponse générique, sans contexte. Temps perdu à réécrire.</a:t>
+            </a:r>
+          </a:p>
+        </p:txBody>
+      </p:sp>
+      <p:sp>
+        <p:nvSpPr>
+          <p:cNvPr id="8" name="Rectangle 7"/>
+          <p:cNvSpPr/>
+          <p:nvPr/>
+        </p:nvSpPr>
+        <p:spPr>
+          <a:xfrm>
+            <a:off x="5943600" y="1463040"/>
+            <a:ext cx="5212080" cy="4754880"/>
+          </a:xfrm>
+          <a:prstGeom prst="rect">
+            <a:avLst/>
+          </a:prstGeom>
+          <a:solidFill>
+            <a:srgbClr val="FFFFFF"/>
+          </a:solidFill>
+          <a:ln>
+            <a:solidFill>
+              <a:srgbClr val="E0E0E0"/>
+            </a:solidFill>
+          </a:ln>
+          <a:effectLst/>
+        </p:spPr>
+        <p:style>
+          <a:lnRef idx="1">
+            <a:schemeClr val="accent1"/>
+          </a:lnRef>
+          <a:fillRef idx="3">
+            <a:schemeClr val="accent1"/>
+          </a:fillRef>
+          <a:effectRef idx="2">
+            <a:schemeClr val="accent1"/>
+          </a:effectRef>
+          <a:fontRef idx="minor">
+            <a:schemeClr val="lt1"/>
+          </a:fontRef>
+        </p:style>
+        <p:txBody>
+          <a:bodyPr rtlCol="0" anchor="ctr"/>
+          <a:lstStyle/>
+          <a:p>
+            <a:pPr algn="ctr"/>
+          </a:p>
+        </p:txBody>
+      </p:sp>
+      <p:pic>
+        <p:nvPicPr>
+          <p:cNvPr id="9" name="Picture 8" descr="circle-check_00874E_30.png"/>
+          <p:cNvPicPr>
+            <a:picLocks noChangeAspect="1"/>
+          </p:cNvPicPr>
+          <p:nvPr/>
+        </p:nvPicPr>
+        <p:blipFill>
+          <a:blip r:embed="rId4"/>
+          <a:stretch>
+            <a:fillRect/>
+          </a:stretch>
+        </p:blipFill>
+        <p:spPr>
+          <a:xfrm>
+            <a:off x="6199632" y="1627632"/>
+            <a:ext cx="292608" cy="292608"/>
+          </a:xfrm>
+          <a:prstGeom prst="rect">
+            <a:avLst/>
+          </a:prstGeom>
+        </p:spPr>
+      </p:pic>
+      <p:sp>
+        <p:nvSpPr>
+          <p:cNvPr id="10" name="TextBox 9"/>
+          <p:cNvSpPr txBox="1"/>
+          <p:nvPr/>
+        </p:nvSpPr>
+        <p:spPr>
+          <a:xfrm>
+            <a:off x="6601968" y="1645920"/>
+            <a:ext cx="4370831" cy="457200"/>
+          </a:xfrm>
+          <a:prstGeom prst="rect">
+            <a:avLst/>
+          </a:prstGeom>
+          <a:noFill/>
+        </p:spPr>
+        <p:txBody>
+          <a:bodyPr wrap="square" lIns="45720" rIns="45720" tIns="18288" bIns="18288">
+            <a:spAutoFit/>
+          </a:bodyPr>
+          <a:lstStyle/>
+          <a:p>
+            <a:pPr algn="l">
+              <a:defRPr sz="1700" b="1">
+                <a:solidFill>
+                  <a:srgbClr val="00874E"/>
+                </a:solidFill>
+                <a:latin typeface="Calibri"/>
+              </a:defRPr>
+            </a:pPr>
+            <a:r>
+              <a:t>APRÈS — Avec persona</a:t>
+            </a:r>
+          </a:p>
+        </p:txBody>
+      </p:sp>
+      <p:sp>
+        <p:nvSpPr>
+          <p:cNvPr id="11" name="TextBox 10"/>
+          <p:cNvSpPr txBox="1"/>
+          <p:nvPr/>
+        </p:nvSpPr>
+        <p:spPr>
+          <a:xfrm>
+            <a:off x="6217920" y="2240280"/>
+            <a:ext cx="4663440" cy="3794760"/>
+          </a:xfrm>
+          <a:prstGeom prst="rect">
+            <a:avLst/>
+          </a:prstGeom>
+          <a:noFill/>
+        </p:spPr>
+        <p:txBody>
+          <a:bodyPr wrap="square">
+            <a:spAutoFit/>
+          </a:bodyPr>
+          <a:lstStyle/>
+          <a:p>
+            <a:pPr>
+              <a:spcAft>
+                <a:spcPts val="400"/>
+              </a:spcAft>
+              <a:defRPr sz="1300">
+                <a:solidFill>
+                  <a:srgbClr val="2B2B2B"/>
+                </a:solidFill>
+                <a:latin typeface="Calibri"/>
+              </a:defRPr>
+            </a:pPr>
+            <a:r>
+              <a:t>«As a senior project manager, draft a reply to this stakeholder. Propose a timeline.»</a:t>
+            </a:r>
+          </a:p>
+          <a:p>
+            <a:pPr>
+              <a:spcAft>
+                <a:spcPts val="400"/>
+              </a:spcAft>
+              <a:defRPr sz="1300">
+                <a:solidFill>
+                  <a:srgbClr val="2B2B2B"/>
+                </a:solidFill>
+                <a:latin typeface="Calibri"/>
+              </a:defRPr>
+            </a:pPr>
+          </a:p>
+          <a:p>
+            <a:pPr>
+              <a:spcAft>
+                <a:spcPts val="400"/>
+              </a:spcAft>
+              <a:defRPr sz="1300">
+                <a:solidFill>
+                  <a:srgbClr val="2B2B2B"/>
+                </a:solidFill>
+                <a:latin typeface="Calibri"/>
+              </a:defRPr>
+            </a:pPr>
+            <a:r>
               <a:t>→ Réponse ciblée, ton professionnel. Prêt à envoyer!</a:t>
+            </a:r>
+          </a:p>
+        </p:txBody>
+      </p:sp>
+      <p:sp>
+        <p:nvSpPr>
+          <p:cNvPr id="12" name="Rectangle 11"/>
+          <p:cNvSpPr/>
+          <p:nvPr/>
+        </p:nvSpPr>
+        <p:spPr>
+          <a:xfrm>
+            <a:off x="457200" y="6446520"/>
+            <a:ext cx="11274552" cy="13716"/>
+          </a:xfrm>
+          <a:prstGeom prst="rect">
+            <a:avLst/>
+          </a:prstGeom>
+          <a:solidFill>
+            <a:srgbClr val="00874E"/>
+          </a:solidFill>
+          <a:ln>
+            <a:noFill/>
+          </a:ln>
+          <a:effectLst/>
+        </p:spPr>
+        <p:style>
+          <a:lnRef idx="1">
+            <a:schemeClr val="accent1"/>
+          </a:lnRef>
+          <a:fillRef idx="3">
+            <a:schemeClr val="accent1"/>
+          </a:fillRef>
+          <a:effectRef idx="2">
+            <a:schemeClr val="accent1"/>
+          </a:effectRef>
+          <a:fontRef idx="minor">
+            <a:schemeClr val="lt1"/>
+          </a:fontRef>
+        </p:style>
+        <p:txBody>
+          <a:bodyPr rtlCol="0" anchor="ctr"/>
+          <a:lstStyle/>
+          <a:p>
+            <a:pPr algn="ctr"/>
+          </a:p>
+        </p:txBody>
+      </p:sp>
+      <p:sp>
+        <p:nvSpPr>
+          <p:cNvPr id="13" name="TextBox 12"/>
+          <p:cNvSpPr txBox="1"/>
+          <p:nvPr/>
+        </p:nvSpPr>
+        <p:spPr>
+          <a:xfrm>
+            <a:off x="457200" y="6537960"/>
+            <a:ext cx="5486400" cy="274320"/>
+          </a:xfrm>
+          <a:prstGeom prst="rect">
+            <a:avLst/>
+          </a:prstGeom>
+          <a:noFill/>
+        </p:spPr>
+        <p:txBody>
+          <a:bodyPr wrap="square" lIns="45720" rIns="45720" tIns="18288" bIns="18288">
+            <a:spAutoFit/>
+          </a:bodyPr>
+          <a:lstStyle/>
+          <a:p>
+            <a:pPr algn="l">
+              <a:defRPr sz="1000" b="0">
+                <a:solidFill>
+                  <a:srgbClr val="6B6B6B"/>
+                </a:solidFill>
+                <a:latin typeface="Calibri"/>
+              </a:defRPr>
+            </a:pPr>
+            <a:r>
+              <a:t>La minute Copilot</a:t>
+            </a:r>
+          </a:p>
+        </p:txBody>
+      </p:sp>
+      <p:sp>
+        <p:nvSpPr>
+          <p:cNvPr id="14" name="TextBox 13"/>
+          <p:cNvSpPr txBox="1"/>
+          <p:nvPr/>
+        </p:nvSpPr>
+        <p:spPr>
+          <a:xfrm>
+            <a:off x="10972800" y="6537960"/>
+            <a:ext cx="822960" cy="274320"/>
+          </a:xfrm>
+          <a:prstGeom prst="rect">
+            <a:avLst/>
+          </a:prstGeom>
+          <a:noFill/>
+        </p:spPr>
+        <p:txBody>
+          <a:bodyPr wrap="square" lIns="45720" rIns="45720" tIns="18288" bIns="18288">
+            <a:spAutoFit/>
+          </a:bodyPr>
+          <a:lstStyle/>
+          <a:p>
+            <a:pPr algn="r">
+              <a:defRPr sz="1000" b="0">
+                <a:solidFill>
+                  <a:srgbClr val="6B6B6B"/>
+                </a:solidFill>
+                <a:latin typeface="Calibri"/>
+              </a:defRPr>
+            </a:pPr>
+            <a:r>
+              <a:t>4</a:t>
             </a:r>
           </a:p>
         </p:txBody>
@@ -5452,7 +6195,7 @@
     <p:bg>
       <p:bgPr>
         <a:solidFill>
-          <a:srgbClr val="FFFFFF"/>
+          <a:srgbClr val="E6F0EA"/>
         </a:solidFill>
         <a:effectLst/>
       </p:bgPr>
@@ -5472,8 +6215,8 @@
         </p:nvSpPr>
         <p:spPr>
           <a:xfrm>
-            <a:off x="457200" y="274320"/>
-            <a:ext cx="10972800" cy="640080"/>
+            <a:off x="457200" y="365760"/>
+            <a:ext cx="10972800" cy="731520"/>
           </a:xfrm>
           <a:prstGeom prst="rect">
             <a:avLst/>
@@ -5481,21 +6224,21 @@
           <a:noFill/>
         </p:spPr>
         <p:txBody>
-          <a:bodyPr wrap="square">
+          <a:bodyPr wrap="square" lIns="45720" rIns="45720" tIns="18288" bIns="18288">
             <a:spAutoFit/>
           </a:bodyPr>
           <a:lstStyle/>
           <a:p>
             <a:pPr algn="l">
-              <a:defRPr sz="3200" b="1">
-                <a:solidFill>
-                  <a:srgbClr val="2B2B2B"/>
+              <a:defRPr sz="2800" b="1">
+                <a:solidFill>
+                  <a:srgbClr val="006B3F"/>
                 </a:solidFill>
                 <a:latin typeface="Calibri"/>
               </a:defRPr>
             </a:pPr>
             <a:r>
-              <a:t>📋 La recette: Persona + Contexte + Tâche + Format</a:t>
+              <a:t>La recette: Persona + Contexte + Tâche + Format</a:t>
             </a:r>
           </a:p>
         </p:txBody>
@@ -5508,8 +6251,8 @@
         </p:nvSpPr>
         <p:spPr>
           <a:xfrm>
-            <a:off x="457200" y="914400"/>
-            <a:ext cx="10972800" cy="457200"/>
+            <a:off x="457200" y="1005840"/>
+            <a:ext cx="10972800" cy="411480"/>
           </a:xfrm>
           <a:prstGeom prst="rect">
             <a:avLst/>
@@ -5517,13 +6260,13 @@
           <a:noFill/>
         </p:spPr>
         <p:txBody>
-          <a:bodyPr wrap="square">
+          <a:bodyPr wrap="square" lIns="45720" rIns="45720" tIns="18288" bIns="18288">
             <a:spAutoFit/>
           </a:bodyPr>
           <a:lstStyle/>
           <a:p>
             <a:pPr algn="l">
-              <a:defRPr sz="1800" b="0">
+              <a:defRPr sz="1500" b="0">
                 <a:solidFill>
                   <a:srgbClr val="6B6B6B"/>
                 </a:solidFill>
@@ -5538,113 +6281,25 @@
       </p:sp>
       <p:sp>
         <p:nvSpPr>
-          <p:cNvPr id="4" name="TextBox 3"/>
-          <p:cNvSpPr txBox="1"/>
-          <p:nvPr/>
-        </p:nvSpPr>
-        <p:spPr>
-          <a:xfrm>
-            <a:off x="457200" y="1554480"/>
-            <a:ext cx="10972800" cy="1371600"/>
-          </a:xfrm>
-          <a:prstGeom prst="rect">
-            <a:avLst/>
-          </a:prstGeom>
-          <a:noFill/>
-        </p:spPr>
-        <p:txBody>
-          <a:bodyPr wrap="square">
-            <a:spAutoFit/>
-          </a:bodyPr>
-          <a:lstStyle/>
-          <a:p>
-            <a:pPr>
-              <a:spcAft>
-                <a:spcPts val="400"/>
-              </a:spcAft>
-              <a:defRPr sz="1400">
-                <a:solidFill>
-                  <a:srgbClr val="2B2B2B"/>
-                </a:solidFill>
-                <a:latin typeface="Calibri"/>
-              </a:defRPr>
-            </a:pPr>
-            <a:r>
-              <a:t>• Persona: Qui es-tu? (chef de projet, développeur, formateur...)</a:t>
-            </a:r>
-          </a:p>
-          <a:p>
-            <a:pPr>
-              <a:spcAft>
-                <a:spcPts val="400"/>
-              </a:spcAft>
-              <a:defRPr sz="1400">
-                <a:solidFill>
-                  <a:srgbClr val="2B2B2B"/>
-                </a:solidFill>
-                <a:latin typeface="Calibri"/>
-              </a:defRPr>
-            </a:pPr>
-            <a:r>
-              <a:t>• Contexte: De quoi parlons-nous? (ce courriel, ce client...)</a:t>
-            </a:r>
-          </a:p>
-          <a:p>
-            <a:pPr>
-              <a:spcAft>
-                <a:spcPts val="400"/>
-              </a:spcAft>
-              <a:defRPr sz="1400">
-                <a:solidFill>
-                  <a:srgbClr val="2B2B2B"/>
-                </a:solidFill>
-                <a:latin typeface="Calibri"/>
-              </a:defRPr>
-            </a:pPr>
-            <a:r>
-              <a:t>• Tâche: Que veux-tu? (résumer, rédiger, analyser...)</a:t>
-            </a:r>
-          </a:p>
-          <a:p>
-            <a:pPr>
-              <a:spcAft>
-                <a:spcPts val="400"/>
-              </a:spcAft>
-              <a:defRPr sz="1400">
-                <a:solidFill>
-                  <a:srgbClr val="2B2B2B"/>
-                </a:solidFill>
-                <a:latin typeface="Calibri"/>
-              </a:defRPr>
-            </a:pPr>
-            <a:r>
-              <a:t>• Format: Comment? (3 puces, tableau, courriel formel...)</a:t>
-            </a:r>
-          </a:p>
-        </p:txBody>
-      </p:sp>
-      <p:sp>
-        <p:nvSpPr>
-          <p:cNvPr id="5" name="Rectangle 4"/>
+          <p:cNvPr id="4" name="Rectangle 3"/>
           <p:cNvSpPr/>
           <p:nvPr/>
         </p:nvSpPr>
         <p:spPr>
           <a:xfrm>
-            <a:off x="457200" y="3017520"/>
-            <a:ext cx="3383280" cy="3657600"/>
+            <a:off x="457200" y="1508760"/>
+            <a:ext cx="11274552" cy="18288"/>
           </a:xfrm>
           <a:prstGeom prst="rect">
             <a:avLst/>
           </a:prstGeom>
           <a:solidFill>
-            <a:srgbClr val="FFFFFF"/>
+            <a:srgbClr val="00874E"/>
           </a:solidFill>
           <a:ln>
-            <a:solidFill>
-              <a:srgbClr val="E0E0E0"/>
-            </a:solidFill>
+            <a:noFill/>
           </a:ln>
+          <a:effectLst/>
         </p:spPr>
         <p:style>
           <a:lnRef idx="1">
@@ -5670,50 +6325,14 @@
       </p:sp>
       <p:sp>
         <p:nvSpPr>
-          <p:cNvPr id="6" name="TextBox 5"/>
+          <p:cNvPr id="5" name="TextBox 4"/>
           <p:cNvSpPr txBox="1"/>
           <p:nvPr/>
         </p:nvSpPr>
         <p:spPr>
           <a:xfrm>
-            <a:off x="731520" y="3200400"/>
-            <a:ext cx="2834640" cy="457200"/>
-          </a:xfrm>
-          <a:prstGeom prst="rect">
-            <a:avLst/>
-          </a:prstGeom>
-          <a:noFill/>
-        </p:spPr>
-        <p:txBody>
-          <a:bodyPr wrap="square">
-            <a:spAutoFit/>
-          </a:bodyPr>
-          <a:lstStyle/>
-          <a:p>
-            <a:pPr algn="l">
-              <a:defRPr sz="1800" b="1">
-                <a:solidFill>
-                  <a:srgbClr val="0078D4"/>
-                </a:solidFill>
-                <a:latin typeface="Calibri"/>
-              </a:defRPr>
-            </a:pPr>
-            <a:r>
-              <a:t>📝 Template universel</a:t>
-            </a:r>
-          </a:p>
-        </p:txBody>
-      </p:sp>
-      <p:sp>
-        <p:nvSpPr>
-          <p:cNvPr id="7" name="TextBox 6"/>
-          <p:cNvSpPr txBox="1"/>
-          <p:nvPr/>
-        </p:nvSpPr>
-        <p:spPr>
-          <a:xfrm>
-            <a:off x="731520" y="3657600"/>
-            <a:ext cx="2834640" cy="2743200"/>
+            <a:off x="457200" y="1737360"/>
+            <a:ext cx="10972800" cy="1188720"/>
           </a:xfrm>
           <a:prstGeom prst="rect">
             <a:avLst/>
@@ -5730,7 +6349,7 @@
               <a:spcAft>
                 <a:spcPts val="400"/>
               </a:spcAft>
-              <a:defRPr sz="1300">
+              <a:defRPr sz="1400">
                 <a:solidFill>
                   <a:srgbClr val="2B2B2B"/>
                 </a:solidFill>
@@ -5738,21 +6357,69 @@
               </a:defRPr>
             </a:pPr>
             <a:r>
-              <a:t>«En tant que [persona], dans le contexte de [sujet], [action] en [format].»</a:t>
-            </a:r>
-          </a:p>
-        </p:txBody>
-      </p:sp>
-      <p:sp>
-        <p:nvSpPr>
-          <p:cNvPr id="8" name="Rectangle 7"/>
+              <a:t>• Persona: Qui es-tu? (chef de projet, développeur, formateur...)</a:t>
+            </a:r>
+          </a:p>
+          <a:p>
+            <a:pPr>
+              <a:spcAft>
+                <a:spcPts val="400"/>
+              </a:spcAft>
+              <a:defRPr sz="1400">
+                <a:solidFill>
+                  <a:srgbClr val="2B2B2B"/>
+                </a:solidFill>
+                <a:latin typeface="Calibri"/>
+              </a:defRPr>
+            </a:pPr>
+            <a:r>
+              <a:t>• Contexte: De quoi parlons-nous? (ce courriel, ce client...)</a:t>
+            </a:r>
+          </a:p>
+          <a:p>
+            <a:pPr>
+              <a:spcAft>
+                <a:spcPts val="400"/>
+              </a:spcAft>
+              <a:defRPr sz="1400">
+                <a:solidFill>
+                  <a:srgbClr val="2B2B2B"/>
+                </a:solidFill>
+                <a:latin typeface="Calibri"/>
+              </a:defRPr>
+            </a:pPr>
+            <a:r>
+              <a:t>• Tâche: Que veux-tu? (résumer, rédiger, analyser...)</a:t>
+            </a:r>
+          </a:p>
+          <a:p>
+            <a:pPr>
+              <a:spcAft>
+                <a:spcPts val="400"/>
+              </a:spcAft>
+              <a:defRPr sz="1400">
+                <a:solidFill>
+                  <a:srgbClr val="2B2B2B"/>
+                </a:solidFill>
+                <a:latin typeface="Calibri"/>
+              </a:defRPr>
+            </a:pPr>
+            <a:r>
+              <a:t>• Format: Comment? (3 puces, tableau, courriel formel...)</a:t>
+            </a:r>
+          </a:p>
+        </p:txBody>
+      </p:sp>
+      <p:sp>
+        <p:nvSpPr>
+          <p:cNvPr id="6" name="Rectangle 5"/>
           <p:cNvSpPr/>
           <p:nvPr/>
         </p:nvSpPr>
         <p:spPr>
           <a:xfrm>
-            <a:off x="4114800" y="3017520"/>
-            <a:ext cx="3383280" cy="3657600"/>
+            <a:off x="457200" y="2926080"/>
+            <a:ext cx="3383280" cy="3291840"/>
           </a:xfrm>
           <a:prstGeom prst="rect">
             <a:avLst/>
@@ -5765,6 +6432,7 @@
               <a:srgbClr val="E0E0E0"/>
             </a:solidFill>
           </a:ln>
+          <a:effectLst/>
         </p:spPr>
         <p:style>
           <a:lnRef idx="1">
@@ -5788,6 +6456,66 @@
           </a:p>
         </p:txBody>
       </p:sp>
+      <p:pic>
+        <p:nvPicPr>
+          <p:cNvPr id="7" name="Picture 6" descr="layout-template_00874E_30.png"/>
+          <p:cNvPicPr>
+            <a:picLocks noChangeAspect="1"/>
+          </p:cNvPicPr>
+          <p:nvPr/>
+        </p:nvPicPr>
+        <p:blipFill>
+          <a:blip r:embed="rId3"/>
+          <a:stretch>
+            <a:fillRect/>
+          </a:stretch>
+        </p:blipFill>
+        <p:spPr>
+          <a:xfrm>
+            <a:off x="713232" y="3090672"/>
+            <a:ext cx="292608" cy="292608"/>
+          </a:xfrm>
+          <a:prstGeom prst="rect">
+            <a:avLst/>
+          </a:prstGeom>
+        </p:spPr>
+      </p:pic>
+      <p:sp>
+        <p:nvSpPr>
+          <p:cNvPr id="8" name="TextBox 7"/>
+          <p:cNvSpPr txBox="1"/>
+          <p:nvPr/>
+        </p:nvSpPr>
+        <p:spPr>
+          <a:xfrm>
+            <a:off x="1115568" y="3108960"/>
+            <a:ext cx="2542032" cy="457200"/>
+          </a:xfrm>
+          <a:prstGeom prst="rect">
+            <a:avLst/>
+          </a:prstGeom>
+          <a:noFill/>
+        </p:spPr>
+        <p:txBody>
+          <a:bodyPr wrap="square" lIns="45720" rIns="45720" tIns="18288" bIns="18288">
+            <a:spAutoFit/>
+          </a:bodyPr>
+          <a:lstStyle/>
+          <a:p>
+            <a:pPr algn="l">
+              <a:defRPr sz="1700" b="1">
+                <a:solidFill>
+                  <a:srgbClr val="00874E"/>
+                </a:solidFill>
+                <a:latin typeface="Calibri"/>
+              </a:defRPr>
+            </a:pPr>
+            <a:r>
+              <a:t>Template universel</a:t>
+            </a:r>
+          </a:p>
+        </p:txBody>
+      </p:sp>
       <p:sp>
         <p:nvSpPr>
           <p:cNvPr id="9" name="TextBox 8"/>
@@ -5796,44 +6524,8 @@
         </p:nvSpPr>
         <p:spPr>
           <a:xfrm>
-            <a:off x="4389120" y="3200400"/>
-            <a:ext cx="2834640" cy="457200"/>
-          </a:xfrm>
-          <a:prstGeom prst="rect">
-            <a:avLst/>
-          </a:prstGeom>
-          <a:noFill/>
-        </p:spPr>
-        <p:txBody>
-          <a:bodyPr wrap="square">
-            <a:spAutoFit/>
-          </a:bodyPr>
-          <a:lstStyle/>
-          <a:p>
-            <a:pPr algn="l">
-              <a:defRPr sz="1800" b="1">
-                <a:solidFill>
-                  <a:srgbClr val="10B981"/>
-                </a:solidFill>
-                <a:latin typeface="Calibri"/>
-              </a:defRPr>
-            </a:pPr>
-            <a:r>
-              <a:t>💡 Exemple</a:t>
-            </a:r>
-          </a:p>
-        </p:txBody>
-      </p:sp>
-      <p:sp>
-        <p:nvSpPr>
-          <p:cNvPr id="10" name="TextBox 9"/>
-          <p:cNvSpPr txBox="1"/>
-          <p:nvPr/>
-        </p:nvSpPr>
-        <p:spPr>
-          <a:xfrm>
-            <a:off x="4389120" y="3657600"/>
-            <a:ext cx="2834640" cy="2743200"/>
+            <a:off x="731520" y="3703320"/>
+            <a:ext cx="2834640" cy="2331720"/>
           </a:xfrm>
           <a:prstGeom prst="rect">
             <a:avLst/>
@@ -5858,21 +6550,21 @@
               </a:defRPr>
             </a:pPr>
             <a:r>
-              <a:t>«En tant que chef de projet, dans le cadre du projet Alpha, résume l'avancement en 3 puces.»</a:t>
-            </a:r>
-          </a:p>
-        </p:txBody>
-      </p:sp>
-      <p:sp>
-        <p:nvSpPr>
-          <p:cNvPr id="11" name="Rectangle 10"/>
+              <a:t>«En tant que [persona], dans le contexte de [sujet], [action] en [format].»</a:t>
+            </a:r>
+          </a:p>
+        </p:txBody>
+      </p:sp>
+      <p:sp>
+        <p:nvSpPr>
+          <p:cNvPr id="10" name="Rectangle 9"/>
           <p:cNvSpPr/>
           <p:nvPr/>
         </p:nvSpPr>
         <p:spPr>
           <a:xfrm>
-            <a:off x="7772400" y="3017520"/>
-            <a:ext cx="3383280" cy="3657600"/>
+            <a:off x="4114800" y="2926080"/>
+            <a:ext cx="3383280" cy="3291840"/>
           </a:xfrm>
           <a:prstGeom prst="rect">
             <a:avLst/>
@@ -5885,6 +6577,7 @@
               <a:srgbClr val="E0E0E0"/>
             </a:solidFill>
           </a:ln>
+          <a:effectLst/>
         </p:spPr>
         <p:style>
           <a:lnRef idx="1">
@@ -5908,6 +6601,30 @@
           </a:p>
         </p:txBody>
       </p:sp>
+      <p:pic>
+        <p:nvPicPr>
+          <p:cNvPr id="11" name="Picture 10" descr="file-text_00874E_30.png"/>
+          <p:cNvPicPr>
+            <a:picLocks noChangeAspect="1"/>
+          </p:cNvPicPr>
+          <p:nvPr/>
+        </p:nvPicPr>
+        <p:blipFill>
+          <a:blip r:embed="rId4"/>
+          <a:stretch>
+            <a:fillRect/>
+          </a:stretch>
+        </p:blipFill>
+        <p:spPr>
+          <a:xfrm>
+            <a:off x="4370832" y="3090672"/>
+            <a:ext cx="292608" cy="292608"/>
+          </a:xfrm>
+          <a:prstGeom prst="rect">
+            <a:avLst/>
+          </a:prstGeom>
+        </p:spPr>
+      </p:pic>
       <p:sp>
         <p:nvSpPr>
           <p:cNvPr id="12" name="TextBox 11"/>
@@ -5916,8 +6633,8 @@
         </p:nvSpPr>
         <p:spPr>
           <a:xfrm>
-            <a:off x="8046720" y="3200400"/>
-            <a:ext cx="2834640" cy="457200"/>
+            <a:off x="4773168" y="3108960"/>
+            <a:ext cx="2542031" cy="457200"/>
           </a:xfrm>
           <a:prstGeom prst="rect">
             <a:avLst/>
@@ -5925,21 +6642,21 @@
           <a:noFill/>
         </p:spPr>
         <p:txBody>
-          <a:bodyPr wrap="square">
+          <a:bodyPr wrap="square" lIns="45720" rIns="45720" tIns="18288" bIns="18288">
             <a:spAutoFit/>
           </a:bodyPr>
           <a:lstStyle/>
           <a:p>
             <a:pPr algn="l">
-              <a:defRPr sz="1800" b="1">
-                <a:solidFill>
-                  <a:srgbClr val="F59E0B"/>
+              <a:defRPr sz="1700" b="1">
+                <a:solidFill>
+                  <a:srgbClr val="00874E"/>
                 </a:solidFill>
                 <a:latin typeface="Calibri"/>
               </a:defRPr>
             </a:pPr>
             <a:r>
-              <a:t>🏪 Sauvegarder</a:t>
+              <a:t>Exemple</a:t>
             </a:r>
           </a:p>
         </p:txBody>
@@ -5952,8 +6669,8 @@
         </p:nvSpPr>
         <p:spPr>
           <a:xfrm>
-            <a:off x="8046720" y="3657600"/>
-            <a:ext cx="2834640" cy="2743200"/>
+            <a:off x="4389120" y="3703320"/>
+            <a:ext cx="2834640" cy="2331720"/>
           </a:xfrm>
           <a:prstGeom prst="rect">
             <a:avLst/>
@@ -5978,9 +6695,138 @@
               </a:defRPr>
             </a:pPr>
             <a:r>
-              <a:t>Quick Parts: votre template</a:t>
-            </a:r>
-          </a:p>
+              <a:t>«En tant que chef de projet, dans le cadre du projet Alpha, résume l'avancement en 3 puces.»</a:t>
+            </a:r>
+          </a:p>
+        </p:txBody>
+      </p:sp>
+      <p:sp>
+        <p:nvSpPr>
+          <p:cNvPr id="14" name="Rectangle 13"/>
+          <p:cNvSpPr/>
+          <p:nvPr/>
+        </p:nvSpPr>
+        <p:spPr>
+          <a:xfrm>
+            <a:off x="7772400" y="2926080"/>
+            <a:ext cx="3383280" cy="3291840"/>
+          </a:xfrm>
+          <a:prstGeom prst="rect">
+            <a:avLst/>
+          </a:prstGeom>
+          <a:solidFill>
+            <a:srgbClr val="FFFFFF"/>
+          </a:solidFill>
+          <a:ln>
+            <a:solidFill>
+              <a:srgbClr val="E0E0E0"/>
+            </a:solidFill>
+          </a:ln>
+          <a:effectLst/>
+        </p:spPr>
+        <p:style>
+          <a:lnRef idx="1">
+            <a:schemeClr val="accent1"/>
+          </a:lnRef>
+          <a:fillRef idx="3">
+            <a:schemeClr val="accent1"/>
+          </a:fillRef>
+          <a:effectRef idx="2">
+            <a:schemeClr val="accent1"/>
+          </a:effectRef>
+          <a:fontRef idx="minor">
+            <a:schemeClr val="lt1"/>
+          </a:fontRef>
+        </p:style>
+        <p:txBody>
+          <a:bodyPr rtlCol="0" anchor="ctr"/>
+          <a:lstStyle/>
+          <a:p>
+            <a:pPr algn="ctr"/>
+          </a:p>
+        </p:txBody>
+      </p:sp>
+      <p:pic>
+        <p:nvPicPr>
+          <p:cNvPr id="15" name="Picture 14" descr="save_F59E0B_30.png"/>
+          <p:cNvPicPr>
+            <a:picLocks noChangeAspect="1"/>
+          </p:cNvPicPr>
+          <p:nvPr/>
+        </p:nvPicPr>
+        <p:blipFill>
+          <a:blip r:embed="rId5"/>
+          <a:stretch>
+            <a:fillRect/>
+          </a:stretch>
+        </p:blipFill>
+        <p:spPr>
+          <a:xfrm>
+            <a:off x="8028431" y="3090672"/>
+            <a:ext cx="292608" cy="292608"/>
+          </a:xfrm>
+          <a:prstGeom prst="rect">
+            <a:avLst/>
+          </a:prstGeom>
+        </p:spPr>
+      </p:pic>
+      <p:sp>
+        <p:nvSpPr>
+          <p:cNvPr id="16" name="TextBox 15"/>
+          <p:cNvSpPr txBox="1"/>
+          <p:nvPr/>
+        </p:nvSpPr>
+        <p:spPr>
+          <a:xfrm>
+            <a:off x="8430767" y="3108960"/>
+            <a:ext cx="2542032" cy="457200"/>
+          </a:xfrm>
+          <a:prstGeom prst="rect">
+            <a:avLst/>
+          </a:prstGeom>
+          <a:noFill/>
+        </p:spPr>
+        <p:txBody>
+          <a:bodyPr wrap="square" lIns="45720" rIns="45720" tIns="18288" bIns="18288">
+            <a:spAutoFit/>
+          </a:bodyPr>
+          <a:lstStyle/>
+          <a:p>
+            <a:pPr algn="l">
+              <a:defRPr sz="1700" b="1">
+                <a:solidFill>
+                  <a:srgbClr val="F59E0B"/>
+                </a:solidFill>
+                <a:latin typeface="Calibri"/>
+              </a:defRPr>
+            </a:pPr>
+            <a:r>
+              <a:t>Sauvegarder</a:t>
+            </a:r>
+          </a:p>
+        </p:txBody>
+      </p:sp>
+      <p:sp>
+        <p:nvSpPr>
+          <p:cNvPr id="17" name="TextBox 16"/>
+          <p:cNvSpPr txBox="1"/>
+          <p:nvPr/>
+        </p:nvSpPr>
+        <p:spPr>
+          <a:xfrm>
+            <a:off x="8046720" y="3703320"/>
+            <a:ext cx="2834640" cy="2331720"/>
+          </a:xfrm>
+          <a:prstGeom prst="rect">
+            <a:avLst/>
+          </a:prstGeom>
+          <a:noFill/>
+        </p:spPr>
+        <p:txBody>
+          <a:bodyPr wrap="square">
+            <a:spAutoFit/>
+          </a:bodyPr>
+          <a:lstStyle/>
           <a:p>
             <a:pPr>
               <a:spcAft>
@@ -5994,7 +6840,7 @@
               </a:defRPr>
             </a:pPr>
             <a:r>
-              <a:t>OneNote: vos personas préférés</a:t>
+              <a:t>Quick Parts: votre template</a:t>
             </a:r>
           </a:p>
           <a:p>
@@ -6010,7 +6856,139 @@
               </a:defRPr>
             </a:pPr>
             <a:r>
+              <a:t>OneNote: vos personas préférés</a:t>
+            </a:r>
+          </a:p>
+          <a:p>
+            <a:pPr>
+              <a:spcAft>
+                <a:spcPts val="400"/>
+              </a:spcAft>
+              <a:defRPr sz="1300">
+                <a:solidFill>
+                  <a:srgbClr val="2B2B2B"/>
+                </a:solidFill>
+                <a:latin typeface="Calibri"/>
+              </a:defRPr>
+            </a:pPr>
+            <a:r>
               <a:t>Copilot Lab: copilot.cloud.microsoft/prompts</a:t>
+            </a:r>
+          </a:p>
+        </p:txBody>
+      </p:sp>
+      <p:sp>
+        <p:nvSpPr>
+          <p:cNvPr id="18" name="Rectangle 17"/>
+          <p:cNvSpPr/>
+          <p:nvPr/>
+        </p:nvSpPr>
+        <p:spPr>
+          <a:xfrm>
+            <a:off x="457200" y="6446520"/>
+            <a:ext cx="11274552" cy="13716"/>
+          </a:xfrm>
+          <a:prstGeom prst="rect">
+            <a:avLst/>
+          </a:prstGeom>
+          <a:solidFill>
+            <a:srgbClr val="00874E"/>
+          </a:solidFill>
+          <a:ln>
+            <a:noFill/>
+          </a:ln>
+          <a:effectLst/>
+        </p:spPr>
+        <p:style>
+          <a:lnRef idx="1">
+            <a:schemeClr val="accent1"/>
+          </a:lnRef>
+          <a:fillRef idx="3">
+            <a:schemeClr val="accent1"/>
+          </a:fillRef>
+          <a:effectRef idx="2">
+            <a:schemeClr val="accent1"/>
+          </a:effectRef>
+          <a:fontRef idx="minor">
+            <a:schemeClr val="lt1"/>
+          </a:fontRef>
+        </p:style>
+        <p:txBody>
+          <a:bodyPr rtlCol="0" anchor="ctr"/>
+          <a:lstStyle/>
+          <a:p>
+            <a:pPr algn="ctr"/>
+          </a:p>
+        </p:txBody>
+      </p:sp>
+      <p:sp>
+        <p:nvSpPr>
+          <p:cNvPr id="19" name="TextBox 18"/>
+          <p:cNvSpPr txBox="1"/>
+          <p:nvPr/>
+        </p:nvSpPr>
+        <p:spPr>
+          <a:xfrm>
+            <a:off x="457200" y="6537960"/>
+            <a:ext cx="5486400" cy="274320"/>
+          </a:xfrm>
+          <a:prstGeom prst="rect">
+            <a:avLst/>
+          </a:prstGeom>
+          <a:noFill/>
+        </p:spPr>
+        <p:txBody>
+          <a:bodyPr wrap="square" lIns="45720" rIns="45720" tIns="18288" bIns="18288">
+            <a:spAutoFit/>
+          </a:bodyPr>
+          <a:lstStyle/>
+          <a:p>
+            <a:pPr algn="l">
+              <a:defRPr sz="1000" b="0">
+                <a:solidFill>
+                  <a:srgbClr val="6B6B6B"/>
+                </a:solidFill>
+                <a:latin typeface="Calibri"/>
+              </a:defRPr>
+            </a:pPr>
+            <a:r>
+              <a:t>La minute Copilot</a:t>
+            </a:r>
+          </a:p>
+        </p:txBody>
+      </p:sp>
+      <p:sp>
+        <p:nvSpPr>
+          <p:cNvPr id="20" name="TextBox 19"/>
+          <p:cNvSpPr txBox="1"/>
+          <p:nvPr/>
+        </p:nvSpPr>
+        <p:spPr>
+          <a:xfrm>
+            <a:off x="10972800" y="6537960"/>
+            <a:ext cx="822960" cy="274320"/>
+          </a:xfrm>
+          <a:prstGeom prst="rect">
+            <a:avLst/>
+          </a:prstGeom>
+          <a:noFill/>
+        </p:spPr>
+        <p:txBody>
+          <a:bodyPr wrap="square" lIns="45720" rIns="45720" tIns="18288" bIns="18288">
+            <a:spAutoFit/>
+          </a:bodyPr>
+          <a:lstStyle/>
+          <a:p>
+            <a:pPr algn="r">
+              <a:defRPr sz="1000" b="0">
+                <a:solidFill>
+                  <a:srgbClr val="6B6B6B"/>
+                </a:solidFill>
+                <a:latin typeface="Calibri"/>
+              </a:defRPr>
+            </a:pPr>
+            <a:r>
+              <a:t>5</a:t>
             </a:r>
           </a:p>
         </p:txBody>
@@ -6029,7 +7007,7 @@
     <p:bg>
       <p:bgPr>
         <a:solidFill>
-          <a:srgbClr val="0078D4"/>
+          <a:srgbClr val="00874E"/>
         </a:solidFill>
         <a:effectLst/>
       </p:bgPr>
@@ -6049,8 +7027,8 @@
         </p:nvSpPr>
         <p:spPr>
           <a:xfrm>
-            <a:off x="914400" y="914400"/>
-            <a:ext cx="10058400" cy="731520"/>
+            <a:off x="914400" y="731520"/>
+            <a:ext cx="10360152" cy="822960"/>
           </a:xfrm>
           <a:prstGeom prst="rect">
             <a:avLst/>
@@ -6058,13 +7036,13 @@
           <a:noFill/>
         </p:spPr>
         <p:txBody>
-          <a:bodyPr wrap="square">
+          <a:bodyPr wrap="square" lIns="45720" rIns="45720" tIns="18288" bIns="18288">
             <a:spAutoFit/>
           </a:bodyPr>
           <a:lstStyle/>
           <a:p>
             <a:pPr algn="ctr">
-              <a:defRPr sz="4000" b="1">
+              <a:defRPr sz="3600" b="1">
                 <a:solidFill>
                   <a:srgbClr val="FFFFFF"/>
                 </a:solidFill>
@@ -6072,7 +7050,7 @@
               </a:defRPr>
             </a:pPr>
             <a:r>
-              <a:t>🎭 À retenir</a:t>
+              <a:t>À retenir</a:t>
             </a:r>
           </a:p>
         </p:txBody>
@@ -6085,8 +7063,8 @@
         </p:nvSpPr>
         <p:spPr>
           <a:xfrm>
-            <a:off x="365760" y="2011680"/>
-            <a:ext cx="3474720" cy="2286000"/>
+            <a:off x="4572000" y="1691640"/>
+            <a:ext cx="3044952" cy="36576"/>
           </a:xfrm>
           <a:prstGeom prst="rect">
             <a:avLst/>
@@ -6095,10 +7073,9 @@
             <a:srgbClr val="FFFFFF"/>
           </a:solidFill>
           <a:ln>
-            <a:solidFill>
-              <a:srgbClr val="AAD4F0"/>
-            </a:solidFill>
+            <a:noFill/>
           </a:ln>
+          <a:effectLst/>
         </p:spPr>
         <p:style>
           <a:lnRef idx="1">
@@ -6124,86 +7101,14 @@
       </p:sp>
       <p:sp>
         <p:nvSpPr>
-          <p:cNvPr id="4" name="TextBox 3"/>
-          <p:cNvSpPr txBox="1"/>
-          <p:nvPr/>
-        </p:nvSpPr>
-        <p:spPr>
-          <a:xfrm>
-            <a:off x="640080" y="2194560"/>
-            <a:ext cx="2926079" cy="548640"/>
-          </a:xfrm>
-          <a:prstGeom prst="rect">
-            <a:avLst/>
-          </a:prstGeom>
-          <a:noFill/>
-        </p:spPr>
-        <p:txBody>
-          <a:bodyPr wrap="square">
-            <a:spAutoFit/>
-          </a:bodyPr>
-          <a:lstStyle/>
-          <a:p>
-            <a:pPr algn="ctr">
-              <a:defRPr sz="2200" b="1">
-                <a:solidFill>
-                  <a:srgbClr val="2B2B2B"/>
-                </a:solidFill>
-                <a:latin typeface="Calibri"/>
-              </a:defRPr>
-            </a:pPr>
-            <a:r>
-              <a:t>🎭 1. Persona</a:t>
-            </a:r>
-          </a:p>
-        </p:txBody>
-      </p:sp>
-      <p:sp>
-        <p:nvSpPr>
-          <p:cNvPr id="5" name="TextBox 4"/>
-          <p:cNvSpPr txBox="1"/>
-          <p:nvPr/>
-        </p:nvSpPr>
-        <p:spPr>
-          <a:xfrm>
-            <a:off x="640080" y="2926080"/>
-            <a:ext cx="2926079" cy="914400"/>
-          </a:xfrm>
-          <a:prstGeom prst="rect">
-            <a:avLst/>
-          </a:prstGeom>
-          <a:noFill/>
-        </p:spPr>
-        <p:txBody>
-          <a:bodyPr wrap="square">
-            <a:spAutoFit/>
-          </a:bodyPr>
-          <a:lstStyle/>
-          <a:p>
-            <a:pPr algn="ctr">
-              <a:defRPr sz="1600" b="0">
-                <a:solidFill>
-                  <a:srgbClr val="6B6B6B"/>
-                </a:solidFill>
-                <a:latin typeface="Calibri"/>
-              </a:defRPr>
-            </a:pPr>
-            <a:r>
-              <a:t>Donnez un rôle à Copilot</a:t>
-            </a:r>
-          </a:p>
-        </p:txBody>
-      </p:sp>
-      <p:sp>
-        <p:nvSpPr>
-          <p:cNvPr id="6" name="Rectangle 5"/>
+          <p:cNvPr id="4" name="Rectangle 3"/>
           <p:cNvSpPr/>
           <p:nvPr/>
         </p:nvSpPr>
         <p:spPr>
           <a:xfrm>
-            <a:off x="3749040" y="2011680"/>
-            <a:ext cx="3474720" cy="2286000"/>
+            <a:off x="806957" y="2103120"/>
+            <a:ext cx="3291840" cy="2286000"/>
           </a:xfrm>
           <a:prstGeom prst="rect">
             <a:avLst/>
@@ -6213,9 +7118,10 @@
           </a:solidFill>
           <a:ln>
             <a:solidFill>
-              <a:srgbClr val="AAD4F0"/>
+              <a:srgbClr val="CCE0D2"/>
             </a:solidFill>
           </a:ln>
+          <a:effectLst/>
         </p:spPr>
         <p:style>
           <a:lnRef idx="1">
@@ -6239,6 +7145,66 @@
           </a:p>
         </p:txBody>
       </p:sp>
+      <p:pic>
+        <p:nvPicPr>
+          <p:cNvPr id="5" name="Picture 4" descr="user_006B3F_36.png"/>
+          <p:cNvPicPr>
+            <a:picLocks noChangeAspect="1"/>
+          </p:cNvPicPr>
+          <p:nvPr/>
+        </p:nvPicPr>
+        <p:blipFill>
+          <a:blip r:embed="rId3"/>
+          <a:stretch>
+            <a:fillRect/>
+          </a:stretch>
+        </p:blipFill>
+        <p:spPr>
+          <a:xfrm>
+            <a:off x="2279141" y="2176272"/>
+            <a:ext cx="347472" cy="347472"/>
+          </a:xfrm>
+          <a:prstGeom prst="rect">
+            <a:avLst/>
+          </a:prstGeom>
+        </p:spPr>
+      </p:pic>
+      <p:sp>
+        <p:nvSpPr>
+          <p:cNvPr id="6" name="TextBox 5"/>
+          <p:cNvSpPr txBox="1"/>
+          <p:nvPr/>
+        </p:nvSpPr>
+        <p:spPr>
+          <a:xfrm>
+            <a:off x="944117" y="2596896"/>
+            <a:ext cx="3017520" cy="548640"/>
+          </a:xfrm>
+          <a:prstGeom prst="rect">
+            <a:avLst/>
+          </a:prstGeom>
+          <a:noFill/>
+        </p:spPr>
+        <p:txBody>
+          <a:bodyPr wrap="square" lIns="45720" rIns="45720" tIns="18288" bIns="18288">
+            <a:spAutoFit/>
+          </a:bodyPr>
+          <a:lstStyle/>
+          <a:p>
+            <a:pPr algn="ctr">
+              <a:defRPr sz="2200" b="1">
+                <a:solidFill>
+                  <a:srgbClr val="006B3F"/>
+                </a:solidFill>
+                <a:latin typeface="Calibri"/>
+              </a:defRPr>
+            </a:pPr>
+            <a:r>
+              <a:t>1. Persona</a:t>
+            </a:r>
+          </a:p>
+        </p:txBody>
+      </p:sp>
       <p:sp>
         <p:nvSpPr>
           <p:cNvPr id="7" name="TextBox 6"/>
@@ -6247,8 +7213,8 @@
         </p:nvSpPr>
         <p:spPr>
           <a:xfrm>
-            <a:off x="4023360" y="2194560"/>
-            <a:ext cx="2926079" cy="548640"/>
+            <a:off x="944117" y="3236976"/>
+            <a:ext cx="3017520" cy="914400"/>
           </a:xfrm>
           <a:prstGeom prst="rect">
             <a:avLst/>
@@ -6256,71 +7222,35 @@
           <a:noFill/>
         </p:spPr>
         <p:txBody>
-          <a:bodyPr wrap="square">
+          <a:bodyPr wrap="square" lIns="45720" rIns="45720" tIns="18288" bIns="18288">
             <a:spAutoFit/>
           </a:bodyPr>
           <a:lstStyle/>
           <a:p>
             <a:pPr algn="ctr">
-              <a:defRPr sz="2200" b="1">
-                <a:solidFill>
-                  <a:srgbClr val="2B2B2B"/>
+              <a:defRPr sz="1500" b="0">
+                <a:solidFill>
+                  <a:srgbClr val="6B6B6B"/>
                 </a:solidFill>
                 <a:latin typeface="Calibri"/>
               </a:defRPr>
             </a:pPr>
             <a:r>
-              <a:t>📝 2. Structure</a:t>
-            </a:r>
-          </a:p>
-        </p:txBody>
-      </p:sp>
-      <p:sp>
-        <p:nvSpPr>
-          <p:cNvPr id="8" name="TextBox 7"/>
-          <p:cNvSpPr txBox="1"/>
-          <p:nvPr/>
-        </p:nvSpPr>
-        <p:spPr>
-          <a:xfrm>
-            <a:off x="4023360" y="2926080"/>
-            <a:ext cx="2926079" cy="914400"/>
-          </a:xfrm>
-          <a:prstGeom prst="rect">
-            <a:avLst/>
-          </a:prstGeom>
-          <a:noFill/>
-        </p:spPr>
-        <p:txBody>
-          <a:bodyPr wrap="square">
-            <a:spAutoFit/>
-          </a:bodyPr>
-          <a:lstStyle/>
-          <a:p>
-            <a:pPr algn="ctr">
-              <a:defRPr sz="1600" b="0">
-                <a:solidFill>
-                  <a:srgbClr val="6B6B6B"/>
-                </a:solidFill>
-                <a:latin typeface="Calibri"/>
-              </a:defRPr>
-            </a:pPr>
-            <a:r>
-              <a:t>Persona + Contexte + Tâche + Format</a:t>
-            </a:r>
-          </a:p>
-        </p:txBody>
-      </p:sp>
-      <p:sp>
-        <p:nvSpPr>
-          <p:cNvPr id="9" name="Rectangle 8"/>
+              <a:t>Donnez un rôle à Copilot</a:t>
+            </a:r>
+          </a:p>
+        </p:txBody>
+      </p:sp>
+      <p:sp>
+        <p:nvSpPr>
+          <p:cNvPr id="8" name="Rectangle 7"/>
           <p:cNvSpPr/>
           <p:nvPr/>
         </p:nvSpPr>
         <p:spPr>
           <a:xfrm>
-            <a:off x="7132320" y="2011680"/>
-            <a:ext cx="3474720" cy="2286000"/>
+            <a:off x="4448556" y="2103120"/>
+            <a:ext cx="3291840" cy="2286000"/>
           </a:xfrm>
           <a:prstGeom prst="rect">
             <a:avLst/>
@@ -6330,9 +7260,10 @@
           </a:solidFill>
           <a:ln>
             <a:solidFill>
-              <a:srgbClr val="AAD4F0"/>
+              <a:srgbClr val="CCE0D2"/>
             </a:solidFill>
           </a:ln>
+          <a:effectLst/>
         </p:spPr>
         <p:style>
           <a:lnRef idx="1">
@@ -6356,6 +7287,30 @@
           </a:p>
         </p:txBody>
       </p:sp>
+      <p:pic>
+        <p:nvPicPr>
+          <p:cNvPr id="9" name="Picture 8" descr="list-tree_006B3F_36.png"/>
+          <p:cNvPicPr>
+            <a:picLocks noChangeAspect="1"/>
+          </p:cNvPicPr>
+          <p:nvPr/>
+        </p:nvPicPr>
+        <p:blipFill>
+          <a:blip r:embed="rId4"/>
+          <a:stretch>
+            <a:fillRect/>
+          </a:stretch>
+        </p:blipFill>
+        <p:spPr>
+          <a:xfrm>
+            <a:off x="5920740" y="2176272"/>
+            <a:ext cx="347472" cy="347472"/>
+          </a:xfrm>
+          <a:prstGeom prst="rect">
+            <a:avLst/>
+          </a:prstGeom>
+        </p:spPr>
+      </p:pic>
       <p:sp>
         <p:nvSpPr>
           <p:cNvPr id="10" name="TextBox 9"/>
@@ -6364,8 +7319,8 @@
         </p:nvSpPr>
         <p:spPr>
           <a:xfrm>
-            <a:off x="7406640" y="2194560"/>
-            <a:ext cx="2926079" cy="548640"/>
+            <a:off x="4585716" y="2596896"/>
+            <a:ext cx="3017520" cy="548640"/>
           </a:xfrm>
           <a:prstGeom prst="rect">
             <a:avLst/>
@@ -6373,7 +7328,7 @@
           <a:noFill/>
         </p:spPr>
         <p:txBody>
-          <a:bodyPr wrap="square">
+          <a:bodyPr wrap="square" lIns="45720" rIns="45720" tIns="18288" bIns="18288">
             <a:spAutoFit/>
           </a:bodyPr>
           <a:lstStyle/>
@@ -6381,13 +7336,13 @@
             <a:pPr algn="ctr">
               <a:defRPr sz="2200" b="1">
                 <a:solidFill>
-                  <a:srgbClr val="2B2B2B"/>
+                  <a:srgbClr val="006B3F"/>
                 </a:solidFill>
                 <a:latin typeface="Calibri"/>
               </a:defRPr>
             </a:pPr>
             <a:r>
-              <a:t>💾 3. Sauvegardez</a:t>
+              <a:t>2. Structure</a:t>
             </a:r>
           </a:p>
         </p:txBody>
@@ -6400,8 +7355,8 @@
         </p:nvSpPr>
         <p:spPr>
           <a:xfrm>
-            <a:off x="7406640" y="2926080"/>
-            <a:ext cx="2926079" cy="914400"/>
+            <a:off x="4585716" y="3236976"/>
+            <a:ext cx="3017520" cy="914400"/>
           </a:xfrm>
           <a:prstGeom prst="rect">
             <a:avLst/>
@@ -6409,13 +7364,13 @@
           <a:noFill/>
         </p:spPr>
         <p:txBody>
-          <a:bodyPr wrap="square">
+          <a:bodyPr wrap="square" lIns="45720" rIns="45720" tIns="18288" bIns="18288">
             <a:spAutoFit/>
           </a:bodyPr>
           <a:lstStyle/>
           <a:p>
             <a:pPr algn="ctr">
-              <a:defRPr sz="1600" b="0">
+              <a:defRPr sz="1500" b="0">
                 <a:solidFill>
                   <a:srgbClr val="6B6B6B"/>
                 </a:solidFill>
@@ -6423,7 +7378,7 @@
               </a:defRPr>
             </a:pPr>
             <a:r>
-              <a:t>Quick Parts pour vos prompts</a:t>
+              <a:t>Persona + Contexte + Tâche + Format</a:t>
             </a:r>
           </a:p>
         </p:txBody>
@@ -6436,20 +7391,21 @@
         </p:nvSpPr>
         <p:spPr>
           <a:xfrm>
-            <a:off x="3200400" y="4754880"/>
-            <a:ext cx="5760720" cy="1097280"/>
+            <a:off x="8090154" y="2103120"/>
+            <a:ext cx="3291840" cy="2286000"/>
           </a:xfrm>
           <a:prstGeom prst="rect">
             <a:avLst/>
           </a:prstGeom>
           <a:solidFill>
-            <a:srgbClr val="FFF3CD"/>
+            <a:srgbClr val="FFFFFF"/>
           </a:solidFill>
           <a:ln>
             <a:solidFill>
-              <a:srgbClr val="FFE082"/>
+              <a:srgbClr val="CCE0D2"/>
             </a:solidFill>
           </a:ln>
+          <a:effectLst/>
         </p:spPr>
         <p:style>
           <a:lnRef idx="1">
@@ -6473,16 +7429,40 @@
           </a:p>
         </p:txBody>
       </p:sp>
-      <p:sp>
-        <p:nvSpPr>
-          <p:cNvPr id="13" name="TextBox 12"/>
+      <p:pic>
+        <p:nvPicPr>
+          <p:cNvPr id="13" name="Picture 12" descr="bookmark_006B3F_36.png"/>
+          <p:cNvPicPr>
+            <a:picLocks noChangeAspect="1"/>
+          </p:cNvPicPr>
+          <p:nvPr/>
+        </p:nvPicPr>
+        <p:blipFill>
+          <a:blip r:embed="rId5"/>
+          <a:stretch>
+            <a:fillRect/>
+          </a:stretch>
+        </p:blipFill>
+        <p:spPr>
+          <a:xfrm>
+            <a:off x="9562338" y="2176272"/>
+            <a:ext cx="347472" cy="347472"/>
+          </a:xfrm>
+          <a:prstGeom prst="rect">
+            <a:avLst/>
+          </a:prstGeom>
+        </p:spPr>
+      </p:pic>
+      <p:sp>
+        <p:nvSpPr>
+          <p:cNvPr id="14" name="TextBox 13"/>
           <p:cNvSpPr txBox="1"/>
           <p:nvPr/>
         </p:nvSpPr>
         <p:spPr>
           <a:xfrm>
-            <a:off x="3383280" y="4937760"/>
-            <a:ext cx="5394960" cy="548640"/>
+            <a:off x="8227314" y="2596896"/>
+            <a:ext cx="3017520" cy="548640"/>
           </a:xfrm>
           <a:prstGeom prst="rect">
             <a:avLst/>
@@ -6490,35 +7470,35 @@
           <a:noFill/>
         </p:spPr>
         <p:txBody>
-          <a:bodyPr wrap="square">
+          <a:bodyPr wrap="square" lIns="45720" rIns="45720" tIns="18288" bIns="18288">
             <a:spAutoFit/>
           </a:bodyPr>
           <a:lstStyle/>
           <a:p>
             <a:pPr algn="ctr">
-              <a:defRPr sz="1600" b="1">
-                <a:solidFill>
-                  <a:srgbClr val="856E04"/>
+              <a:defRPr sz="2200" b="1">
+                <a:solidFill>
+                  <a:srgbClr val="006B3F"/>
                 </a:solidFill>
                 <a:latin typeface="Calibri"/>
               </a:defRPr>
             </a:pPr>
             <a:r>
-              <a:t>🎯 Défi: Ajoutez un persona à TOUS vos prompts cette semaine!</a:t>
-            </a:r>
-          </a:p>
-        </p:txBody>
-      </p:sp>
-      <p:sp>
-        <p:nvSpPr>
-          <p:cNvPr id="14" name="TextBox 13"/>
+              <a:t>3. Sauvegardez</a:t>
+            </a:r>
+          </a:p>
+        </p:txBody>
+      </p:sp>
+      <p:sp>
+        <p:nvSpPr>
+          <p:cNvPr id="15" name="TextBox 14"/>
           <p:cNvSpPr txBox="1"/>
           <p:nvPr/>
         </p:nvSpPr>
         <p:spPr>
           <a:xfrm>
-            <a:off x="914400" y="6126480"/>
-            <a:ext cx="10058400" cy="457200"/>
+            <a:off x="8227314" y="3236976"/>
+            <a:ext cx="3017520" cy="914400"/>
           </a:xfrm>
           <a:prstGeom prst="rect">
             <a:avLst/>
@@ -6526,21 +7506,183 @@
           <a:noFill/>
         </p:spPr>
         <p:txBody>
-          <a:bodyPr wrap="square">
+          <a:bodyPr wrap="square" lIns="45720" rIns="45720" tIns="18288" bIns="18288">
             <a:spAutoFit/>
           </a:bodyPr>
           <a:lstStyle/>
           <a:p>
             <a:pPr algn="ctr">
-              <a:defRPr sz="1400" b="0">
-                <a:solidFill>
-                  <a:srgbClr val="AAD4F0"/>
+              <a:defRPr sz="1500" b="0">
+                <a:solidFill>
+                  <a:srgbClr val="6B6B6B"/>
                 </a:solidFill>
                 <a:latin typeface="Calibri"/>
               </a:defRPr>
             </a:pPr>
             <a:r>
-              <a:t>La minute Copilot — À la semaine prochaine! 👋</a:t>
+              <a:t>Quick Parts pour vos prompts</a:t>
+            </a:r>
+          </a:p>
+        </p:txBody>
+      </p:sp>
+      <p:sp>
+        <p:nvSpPr>
+          <p:cNvPr id="16" name="Rectangle 15"/>
+          <p:cNvSpPr/>
+          <p:nvPr/>
+        </p:nvSpPr>
+        <p:spPr>
+          <a:xfrm>
+            <a:off x="2423160" y="4681728"/>
+            <a:ext cx="7342631" cy="1078992"/>
+          </a:xfrm>
+          <a:prstGeom prst="rect">
+            <a:avLst/>
+          </a:prstGeom>
+          <a:solidFill>
+            <a:srgbClr val="FFFFFF"/>
+          </a:solidFill>
+          <a:ln>
+            <a:solidFill>
+              <a:srgbClr val="CCE0D2"/>
+            </a:solidFill>
+          </a:ln>
+          <a:effectLst/>
+        </p:spPr>
+        <p:style>
+          <a:lnRef idx="1">
+            <a:schemeClr val="accent1"/>
+          </a:lnRef>
+          <a:fillRef idx="3">
+            <a:schemeClr val="accent1"/>
+          </a:fillRef>
+          <a:effectRef idx="2">
+            <a:schemeClr val="accent1"/>
+          </a:effectRef>
+          <a:fontRef idx="minor">
+            <a:schemeClr val="lt1"/>
+          </a:fontRef>
+        </p:style>
+        <p:txBody>
+          <a:bodyPr rtlCol="0" anchor="ctr"/>
+          <a:lstStyle/>
+          <a:p>
+            <a:pPr algn="ctr"/>
+          </a:p>
+        </p:txBody>
+      </p:sp>
+      <p:sp>
+        <p:nvSpPr>
+          <p:cNvPr id="17" name="Rectangle 16"/>
+          <p:cNvSpPr/>
+          <p:nvPr/>
+        </p:nvSpPr>
+        <p:spPr>
+          <a:xfrm>
+            <a:off x="2423160" y="4681728"/>
+            <a:ext cx="64008" cy="1078992"/>
+          </a:xfrm>
+          <a:prstGeom prst="rect">
+            <a:avLst/>
+          </a:prstGeom>
+          <a:solidFill>
+            <a:srgbClr val="00874E"/>
+          </a:solidFill>
+          <a:ln>
+            <a:noFill/>
+          </a:ln>
+          <a:effectLst/>
+        </p:spPr>
+        <p:style>
+          <a:lnRef idx="1">
+            <a:schemeClr val="accent1"/>
+          </a:lnRef>
+          <a:fillRef idx="3">
+            <a:schemeClr val="accent1"/>
+          </a:fillRef>
+          <a:effectRef idx="2">
+            <a:schemeClr val="accent1"/>
+          </a:effectRef>
+          <a:fontRef idx="minor">
+            <a:schemeClr val="lt1"/>
+          </a:fontRef>
+        </p:style>
+        <p:txBody>
+          <a:bodyPr rtlCol="0" anchor="ctr"/>
+          <a:lstStyle/>
+          <a:p>
+            <a:pPr algn="ctr"/>
+          </a:p>
+        </p:txBody>
+      </p:sp>
+      <p:sp>
+        <p:nvSpPr>
+          <p:cNvPr id="18" name="TextBox 17"/>
+          <p:cNvSpPr txBox="1"/>
+          <p:nvPr/>
+        </p:nvSpPr>
+        <p:spPr>
+          <a:xfrm>
+            <a:off x="2587752" y="4937760"/>
+            <a:ext cx="7013447" cy="713231"/>
+          </a:xfrm>
+          <a:prstGeom prst="rect">
+            <a:avLst/>
+          </a:prstGeom>
+          <a:noFill/>
+        </p:spPr>
+        <p:txBody>
+          <a:bodyPr wrap="square" lIns="45720" rIns="45720" tIns="18288" bIns="18288">
+            <a:spAutoFit/>
+          </a:bodyPr>
+          <a:lstStyle/>
+          <a:p>
+            <a:pPr algn="ctr">
+              <a:defRPr sz="1500" b="1">
+                <a:solidFill>
+                  <a:srgbClr val="006B3F"/>
+                </a:solidFill>
+                <a:latin typeface="Calibri"/>
+              </a:defRPr>
+            </a:pPr>
+            <a:r>
+              <a:t>Défi: Ajoutez un persona à TOUS vos prompts cette semaine!</a:t>
+            </a:r>
+          </a:p>
+        </p:txBody>
+      </p:sp>
+      <p:sp>
+        <p:nvSpPr>
+          <p:cNvPr id="19" name="TextBox 18"/>
+          <p:cNvSpPr txBox="1"/>
+          <p:nvPr/>
+        </p:nvSpPr>
+        <p:spPr>
+          <a:xfrm>
+            <a:off x="914400" y="5989320"/>
+            <a:ext cx="10360152" cy="365760"/>
+          </a:xfrm>
+          <a:prstGeom prst="rect">
+            <a:avLst/>
+          </a:prstGeom>
+          <a:noFill/>
+        </p:spPr>
+        <p:txBody>
+          <a:bodyPr wrap="square" lIns="45720" rIns="45720" tIns="18288" bIns="18288">
+            <a:spAutoFit/>
+          </a:bodyPr>
+          <a:lstStyle/>
+          <a:p>
+            <a:pPr algn="ctr">
+              <a:defRPr sz="1300" b="0">
+                <a:solidFill>
+                  <a:srgbClr val="CCE0D2"/>
+                </a:solidFill>
+                <a:latin typeface="Calibri"/>
+              </a:defRPr>
+            </a:pPr>
+            <a:r>
+              <a:t>La minute Copilot — À la semaine prochaine!</a:t>
             </a:r>
           </a:p>
         </p:txBody>

--- a/presentations/La_Minute_Copilot_Personas.pptx
+++ b/presentations/La_Minute_Copilot_Personas.pptx
@@ -507,7 +507,7 @@
           <a:lstStyle/>
           <a:p>
             <a:r>
-              <a:t>Accueil: Aujourd'hui on va voir un truc qui change TOUT: donner un persona à Copilot.</a:t>
+              <a:t>Accueil: Aujourd'hui on va voir un truc qui change TOUT: donner un persona à Copilot. C'est simple, ça prend 5 secondes, et ça transforme une réponse générique en réponse experte.</a:t>
             </a:r>
           </a:p>
         </p:txBody>
@@ -577,7 +577,7 @@
           <a:lstStyle/>
           <a:p>
             <a:r>
-              <a:t>Un persona c'est dire à Copilot QUI il est. Montrer la différence entre réponse avec et sans persona.</a:t>
+              <a:t>Un persona c'est dire à Copilot QUI il est avant de lui donner une tâche. Montrer la différence entre réponse avec et sans persona. Insister: la réponse sans persona n'est pas mauvaise — elle est juste applicable à personne en particulier.</a:t>
             </a:r>
           </a:p>
         </p:txBody>
@@ -647,7 +647,7 @@
           <a:lstStyle/>
           <a:p>
             <a:r>
-              <a:t>3 personas clés. Sauvegardez-les dans Quick Parts!</a:t>
+              <a:t>La formule magique. Applicable partout: Outlook, Teams, Word, Copilot Chat. Montrer le template universel — inviter les gens à le photographier ou le noter. C'est la diapo la plus importante de l'épisode.</a:t>
             </a:r>
           </a:p>
         </p:txBody>
@@ -717,7 +717,7 @@
           <a:lstStyle/>
           <a:p>
             <a:r>
-              <a:t>Lire les deux versions. Le persona change COMMENT c'est présenté, pas ce qu'on demande.</a:t>
+              <a:t>3 personas clés adaptés au contexte d'une institution financière. Chacun change radicalement le ton et le contenu de la réponse. Insister: le même prompt avec trois personas différents donne trois réponses très différentes. Démontrer si le temps le permet.</a:t>
             </a:r>
           </a:p>
         </p:txBody>
@@ -787,7 +787,7 @@
           <a:lstStyle/>
           <a:p>
             <a:r>
-              <a:t>La formule magique. Applicable partout: Outlook, Teams, Word, Copilot Chat.</a:t>
+              <a:t>Lire les deux versions à voix haute. Bien insister sur la différence de ton et de contenu. Le persona change COMMENT c'est présenté et QUOI est inclus — pas seulement le style.</a:t>
             </a:r>
           </a:p>
         </p:txBody>
@@ -857,7 +857,7 @@
           <a:lstStyle/>
           <a:p>
             <a:r>
-              <a:t>Défi de la semaine: essayer UN prompt avec persona au lieu de sans.</a:t>
+              <a:t>Défi de la semaine: essayer UN prompt avec persona au lieu de sans. Choisir la prochaine tâche dans Outlook ou Copilot Chat et ajouter «En tant que [votre rôle]» au début. Observer la différence.</a:t>
             </a:r>
           </a:p>
         </p:txBody>
@@ -4067,6 +4067,78 @@
           </a:p>
         </p:txBody>
       </p:sp>
+      <p:sp>
+        <p:nvSpPr>
+          <p:cNvPr id="7" name="TextBox 6"/>
+          <p:cNvSpPr txBox="1"/>
+          <p:nvPr/>
+        </p:nvSpPr>
+        <p:spPr>
+          <a:xfrm>
+            <a:off x="640080" y="5029200"/>
+            <a:ext cx="5669280" cy="320040"/>
+          </a:xfrm>
+          <a:prstGeom prst="rect">
+            <a:avLst/>
+          </a:prstGeom>
+          <a:noFill/>
+        </p:spPr>
+        <p:txBody>
+          <a:bodyPr wrap="square" lIns="45720" rIns="45720" tIns="18288" bIns="18288">
+            <a:spAutoFit/>
+          </a:bodyPr>
+          <a:lstStyle/>
+          <a:p>
+            <a:pPr algn="l">
+              <a:defRPr sz="1300" b="1">
+                <a:solidFill>
+                  <a:srgbClr val="FFFFFF"/>
+                </a:solidFill>
+                <a:latin typeface="Calibri"/>
+              </a:defRPr>
+            </a:pPr>
+            <a:r>
+              <a:t>Martin Fournier</a:t>
+            </a:r>
+          </a:p>
+        </p:txBody>
+      </p:sp>
+      <p:sp>
+        <p:nvSpPr>
+          <p:cNvPr id="8" name="TextBox 7"/>
+          <p:cNvSpPr txBox="1"/>
+          <p:nvPr/>
+        </p:nvSpPr>
+        <p:spPr>
+          <a:xfrm>
+            <a:off x="640080" y="5349240"/>
+            <a:ext cx="5669280" cy="274320"/>
+          </a:xfrm>
+          <a:prstGeom prst="rect">
+            <a:avLst/>
+          </a:prstGeom>
+          <a:noFill/>
+        </p:spPr>
+        <p:txBody>
+          <a:bodyPr wrap="square" lIns="45720" rIns="45720" tIns="18288" bIns="18288">
+            <a:spAutoFit/>
+          </a:bodyPr>
+          <a:lstStyle/>
+          <a:p>
+            <a:pPr algn="l">
+              <a:defRPr sz="1200" b="0">
+                <a:solidFill>
+                  <a:srgbClr val="CCE0D2"/>
+                </a:solidFill>
+                <a:latin typeface="Calibri"/>
+              </a:defRPr>
+            </a:pPr>
+            <a:r>
+              <a:t>2026-05-17</a:t>
+            </a:r>
+          </a:p>
+        </p:txBody>
+      </p:sp>
     </p:spTree>
   </p:cSld>
   <p:clrMapOvr>
@@ -4275,7 +4347,7 @@
               </a:defRPr>
             </a:pPr>
             <a:r>
-              <a:t>• Sans persona: réponse générique et moyenne</a:t>
+              <a:t>• Sans persona: réponse générique, hors contexte</a:t>
             </a:r>
           </a:p>
           <a:p>
@@ -4291,7 +4363,7 @@
               </a:defRPr>
             </a:pPr>
             <a:r>
-              <a:t>• Avec persona: réponse experte et ciblée</a:t>
+              <a:t>• Avec persona: réponse experte, ciblée, prête à utiliser</a:t>
             </a:r>
           </a:p>
         </p:txBody>
@@ -4397,7 +4469,7 @@
               </a:defRPr>
             </a:pPr>
             <a:r>
-              <a:t>Sans persona (moyen)</a:t>
+              <a:t>Sans persona (hors contexte)</a:t>
             </a:r>
           </a:p>
         </p:txBody>
@@ -4465,7 +4537,71 @@
               </a:defRPr>
             </a:pPr>
             <a:r>
-              <a:t>→ Réponse générique, sans personnalité, applicable à personne</a:t>
+              <a:t>→ Réponse générique,</a:t>
+            </a:r>
+          </a:p>
+          <a:p>
+            <a:pPr>
+              <a:spcAft>
+                <a:spcPts val="400"/>
+              </a:spcAft>
+              <a:defRPr sz="1300">
+                <a:solidFill>
+                  <a:srgbClr val="2B2B2B"/>
+                </a:solidFill>
+                <a:latin typeface="Calibri"/>
+              </a:defRPr>
+            </a:pPr>
+            <a:r>
+              <a:t>sans personnalité,</a:t>
+            </a:r>
+          </a:p>
+          <a:p>
+            <a:pPr>
+              <a:spcAft>
+                <a:spcPts val="400"/>
+              </a:spcAft>
+              <a:defRPr sz="1300">
+                <a:solidFill>
+                  <a:srgbClr val="2B2B2B"/>
+                </a:solidFill>
+                <a:latin typeface="Calibri"/>
+              </a:defRPr>
+            </a:pPr>
+            <a:r>
+              <a:t>applicable à n'importe</a:t>
+            </a:r>
+          </a:p>
+          <a:p>
+            <a:pPr>
+              <a:spcAft>
+                <a:spcPts val="400"/>
+              </a:spcAft>
+              <a:defRPr sz="1300">
+                <a:solidFill>
+                  <a:srgbClr val="2B2B2B"/>
+                </a:solidFill>
+                <a:latin typeface="Calibri"/>
+              </a:defRPr>
+            </a:pPr>
+            <a:r>
+              <a:t>quelle entreprise.</a:t>
+            </a:r>
+          </a:p>
+          <a:p>
+            <a:pPr>
+              <a:spcAft>
+                <a:spcPts val="400"/>
+              </a:spcAft>
+              <a:defRPr sz="1300">
+                <a:solidFill>
+                  <a:srgbClr val="2B2B2B"/>
+                </a:solidFill>
+                <a:latin typeface="Calibri"/>
+              </a:defRPr>
+            </a:pPr>
+            <a:r>
+              <a:t>À réécrire entièrement.</a:t>
             </a:r>
           </a:p>
         </p:txBody>
@@ -4571,7 +4707,7 @@
               </a:defRPr>
             </a:pPr>
             <a:r>
-              <a:t>Avec persona (puissant)</a:t>
+              <a:t>Avec persona (ciblé)</a:t>
             </a:r>
           </a:p>
         </p:txBody>
@@ -4610,7 +4746,7 @@
               </a:defRPr>
             </a:pPr>
             <a:r>
-              <a:t>«En tant que chef de projet senior, rédige un courriel de suivi technique»</a:t>
+              <a:t>«En tant que chef de projet</a:t>
             </a:r>
           </a:p>
           <a:p>
@@ -4625,6 +4761,9 @@
                 <a:latin typeface="Calibri"/>
               </a:defRPr>
             </a:pPr>
+            <a:r>
+              <a:t>senior, rédige un courriel</a:t>
+            </a:r>
           </a:p>
           <a:p>
             <a:pPr>
@@ -4639,7 +4778,68 @@
               </a:defRPr>
             </a:pPr>
             <a:r>
-              <a:t>→ Réponse experte, ton adapté, détails pertinents</a:t>
+              <a:t>de suivi technique sur</a:t>
+            </a:r>
+          </a:p>
+          <a:p>
+            <a:pPr>
+              <a:spcAft>
+                <a:spcPts val="400"/>
+              </a:spcAft>
+              <a:defRPr sz="1300">
+                <a:solidFill>
+                  <a:srgbClr val="2B2B2B"/>
+                </a:solidFill>
+                <a:latin typeface="Calibri"/>
+              </a:defRPr>
+            </a:pPr>
+            <a:r>
+              <a:t>la migration ServiceNow»</a:t>
+            </a:r>
+          </a:p>
+          <a:p>
+            <a:pPr>
+              <a:spcAft>
+                <a:spcPts val="400"/>
+              </a:spcAft>
+              <a:defRPr sz="1300">
+                <a:solidFill>
+                  <a:srgbClr val="2B2B2B"/>
+                </a:solidFill>
+                <a:latin typeface="Calibri"/>
+              </a:defRPr>
+            </a:pPr>
+          </a:p>
+          <a:p>
+            <a:pPr>
+              <a:spcAft>
+                <a:spcPts val="400"/>
+              </a:spcAft>
+              <a:defRPr sz="1300">
+                <a:solidFill>
+                  <a:srgbClr val="2B2B2B"/>
+                </a:solidFill>
+                <a:latin typeface="Calibri"/>
+              </a:defRPr>
+            </a:pPr>
+            <a:r>
+              <a:t>→ Ton adapté, détails</a:t>
+            </a:r>
+          </a:p>
+          <a:p>
+            <a:pPr>
+              <a:spcAft>
+                <a:spcPts val="400"/>
+              </a:spcAft>
+              <a:defRPr sz="1300">
+                <a:solidFill>
+                  <a:srgbClr val="2B2B2B"/>
+                </a:solidFill>
+                <a:latin typeface="Calibri"/>
+              </a:defRPr>
+            </a:pPr>
+            <a:r>
+              <a:t>pertinents. Prêt à envoyer.</a:t>
             </a:r>
           </a:p>
         </p:txBody>
@@ -4817,7 +5017,7 @@
               </a:defRPr>
             </a:pPr>
             <a:r>
-              <a:t>3 personas indispensables dans Outlook</a:t>
+              <a:t>La recette: Persona + Contexte + Tâche + Format</a:t>
             </a:r>
           </a:p>
         </p:txBody>
@@ -4853,7 +5053,7 @@
               </a:defRPr>
             </a:pPr>
             <a:r>
-              <a:t>Pour chaque situation, le bon rôle</a:t>
+              <a:t>La formule magique du prompt parfait</a:t>
             </a:r>
           </a:p>
         </p:txBody>
@@ -4936,7 +5136,7 @@
               </a:defRPr>
             </a:pPr>
             <a:r>
-              <a:t>• Ajoutez le persona au début du prompt</a:t>
+              <a:t>• Persona: Qui es-tu? (analyste risques, chef de projet, auditeur...)</a:t>
             </a:r>
           </a:p>
           <a:p>
@@ -4952,7 +5152,7 @@
               </a:defRPr>
             </a:pPr>
             <a:r>
-              <a:t>• Copilot garde le contexte</a:t>
+              <a:t>• Contexte: De quoi parlons-nous? (ce courriel, ce client, ce projet...)</a:t>
             </a:r>
           </a:p>
           <a:p>
@@ -4968,7 +5168,23 @@
               </a:defRPr>
             </a:pPr>
             <a:r>
-              <a:t>• Combinez persona + consigne + format</a:t>
+              <a:t>• Tâche: Que veux-tu? (résumer, rédiger, analyser, comparer...)</a:t>
+            </a:r>
+          </a:p>
+          <a:p>
+            <a:pPr>
+              <a:spcAft>
+                <a:spcPts val="400"/>
+              </a:spcAft>
+              <a:defRPr sz="1400">
+                <a:solidFill>
+                  <a:srgbClr val="2B2B2B"/>
+                </a:solidFill>
+                <a:latin typeface="Calibri"/>
+              </a:defRPr>
+            </a:pPr>
+            <a:r>
+              <a:t>• Format: Comment? (3 puces, tableau, courriel formel, rapport...)</a:t>
             </a:r>
           </a:p>
         </p:txBody>
@@ -5021,7 +5237,7 @@
       </p:sp>
       <p:pic>
         <p:nvPicPr>
-          <p:cNvPr id="7" name="Picture 6" descr="briefcase_00874E_30.png"/>
+          <p:cNvPr id="7" name="Picture 6" descr="layout-template_00874E_30.png"/>
           <p:cNvPicPr>
             <a:picLocks noChangeAspect="1"/>
           </p:cNvPicPr>
@@ -5074,7 +5290,7 @@
               </a:defRPr>
             </a:pPr>
             <a:r>
-              <a:t>Persona professionnel</a:t>
+              <a:t>Template universel</a:t>
             </a:r>
           </a:p>
         </p:txBody>
@@ -5113,7 +5329,7 @@
               </a:defRPr>
             </a:pPr>
             <a:r>
-              <a:t>«En tant que directeur général, réponds à un partenaire d'affaires. Ton formel mais pas froid.»</a:t>
+              <a:t>«En tant que [persona],</a:t>
             </a:r>
           </a:p>
           <a:p>
@@ -5128,6 +5344,9 @@
                 <a:latin typeface="Calibri"/>
               </a:defRPr>
             </a:pPr>
+            <a:r>
+              <a:t>dans le contexte de [sujet],</a:t>
+            </a:r>
           </a:p>
           <a:p>
             <a:pPr>
@@ -5142,7 +5361,36 @@
               </a:defRPr>
             </a:pPr>
             <a:r>
-              <a:t>Parfait pour clients et partenaires</a:t>
+              <a:t>[action] en [format].»</a:t>
+            </a:r>
+          </a:p>
+          <a:p>
+            <a:pPr>
+              <a:spcAft>
+                <a:spcPts val="400"/>
+              </a:spcAft>
+              <a:defRPr sz="1300">
+                <a:solidFill>
+                  <a:srgbClr val="2B2B2B"/>
+                </a:solidFill>
+                <a:latin typeface="Calibri"/>
+              </a:defRPr>
+            </a:pPr>
+          </a:p>
+          <a:p>
+            <a:pPr>
+              <a:spcAft>
+                <a:spcPts val="400"/>
+              </a:spcAft>
+              <a:defRPr sz="1300">
+                <a:solidFill>
+                  <a:srgbClr val="2B2B2B"/>
+                </a:solidFill>
+                <a:latin typeface="Calibri"/>
+              </a:defRPr>
+            </a:pPr>
+            <a:r>
+              <a:t>Photographiez cette diapo!</a:t>
             </a:r>
           </a:p>
         </p:txBody>
@@ -5195,7 +5443,7 @@
       </p:sp>
       <p:pic>
         <p:nvPicPr>
-          <p:cNvPr id="11" name="Picture 10" descr="users_00874E_30.png"/>
+          <p:cNvPr id="11" name="Picture 10" descr="file-text_00874E_30.png"/>
           <p:cNvPicPr>
             <a:picLocks noChangeAspect="1"/>
           </p:cNvPicPr>
@@ -5248,7 +5496,7 @@
               </a:defRPr>
             </a:pPr>
             <a:r>
-              <a:t>Persona collaborateur</a:t>
+              <a:t>Exemple institution financière</a:t>
             </a:r>
           </a:p>
         </p:txBody>
@@ -5287,7 +5535,7 @@
               </a:defRPr>
             </a:pPr>
             <a:r>
-              <a:t>«En tant que collègue, écris à mon équipe. On se tutoie. Sois direct et amical.»</a:t>
+              <a:t>«En tant qu'analyste en</a:t>
             </a:r>
           </a:p>
           <a:p>
@@ -5302,6 +5550,9 @@
                 <a:latin typeface="Calibri"/>
               </a:defRPr>
             </a:pPr>
+            <a:r>
+              <a:t>gestion des risques, dans</a:t>
+            </a:r>
           </a:p>
           <a:p>
             <a:pPr>
@@ -5316,7 +5567,55 @@
               </a:defRPr>
             </a:pPr>
             <a:r>
-              <a:t>Parfait pour interne</a:t>
+              <a:t>le cadre de l'audit Q2,</a:t>
+            </a:r>
+          </a:p>
+          <a:p>
+            <a:pPr>
+              <a:spcAft>
+                <a:spcPts val="400"/>
+              </a:spcAft>
+              <a:defRPr sz="1300">
+                <a:solidFill>
+                  <a:srgbClr val="2B2B2B"/>
+                </a:solidFill>
+                <a:latin typeface="Calibri"/>
+              </a:defRPr>
+            </a:pPr>
+            <a:r>
+              <a:t>résume les écarts identifiés</a:t>
+            </a:r>
+          </a:p>
+          <a:p>
+            <a:pPr>
+              <a:spcAft>
+                <a:spcPts val="400"/>
+              </a:spcAft>
+              <a:defRPr sz="1300">
+                <a:solidFill>
+                  <a:srgbClr val="2B2B2B"/>
+                </a:solidFill>
+                <a:latin typeface="Calibri"/>
+              </a:defRPr>
+            </a:pPr>
+            <a:r>
+              <a:t>en 3 puces avec niveau</a:t>
+            </a:r>
+          </a:p>
+          <a:p>
+            <a:pPr>
+              <a:spcAft>
+                <a:spcPts val="400"/>
+              </a:spcAft>
+              <a:defRPr sz="1300">
+                <a:solidFill>
+                  <a:srgbClr val="2B2B2B"/>
+                </a:solidFill>
+                <a:latin typeface="Calibri"/>
+              </a:defRPr>
+            </a:pPr>
+            <a:r>
+              <a:t>de risque (faible/moyen/élevé).»</a:t>
             </a:r>
           </a:p>
         </p:txBody>
@@ -5369,7 +5668,7 @@
       </p:sp>
       <p:pic>
         <p:nvPicPr>
-          <p:cNvPr id="15" name="Picture 14" descr="graduation-cap_F59E0B_30.png"/>
+          <p:cNvPr id="15" name="Picture 14" descr="save_F59E0B_30.png"/>
           <p:cNvPicPr>
             <a:picLocks noChangeAspect="1"/>
           </p:cNvPicPr>
@@ -5422,7 +5721,7 @@
               </a:defRPr>
             </a:pPr>
             <a:r>
-              <a:t>Persona vulgarisateur</a:t>
+              <a:t>Sauvegarder</a:t>
             </a:r>
           </a:p>
         </p:txBody>
@@ -5461,7 +5760,7 @@
               </a:defRPr>
             </a:pPr>
             <a:r>
-              <a:t>«En tant que formateur, explique ce concept technique simplement. Pas de jargon.»</a:t>
+              <a:t>Quick Parts Outlook:</a:t>
             </a:r>
           </a:p>
           <a:p>
@@ -5476,6 +5775,9 @@
                 <a:latin typeface="Calibri"/>
               </a:defRPr>
             </a:pPr>
+            <a:r>
+              <a:t>votre template favori</a:t>
+            </a:r>
           </a:p>
           <a:p>
             <a:pPr>
@@ -5489,8 +5791,82 @@
                 <a:latin typeface="Calibri"/>
               </a:defRPr>
             </a:pPr>
-            <a:r>
-              <a:t>Parfait pour IT vers non-IT</a:t>
+          </a:p>
+          <a:p>
+            <a:pPr>
+              <a:spcAft>
+                <a:spcPts val="400"/>
+              </a:spcAft>
+              <a:defRPr sz="1300">
+                <a:solidFill>
+                  <a:srgbClr val="2B2B2B"/>
+                </a:solidFill>
+                <a:latin typeface="Calibri"/>
+              </a:defRPr>
+            </a:pPr>
+            <a:r>
+              <a:t>OneNote: vos personas</a:t>
+            </a:r>
+          </a:p>
+          <a:p>
+            <a:pPr>
+              <a:spcAft>
+                <a:spcPts val="400"/>
+              </a:spcAft>
+              <a:defRPr sz="1300">
+                <a:solidFill>
+                  <a:srgbClr val="2B2B2B"/>
+                </a:solidFill>
+                <a:latin typeface="Calibri"/>
+              </a:defRPr>
+            </a:pPr>
+            <a:r>
+              <a:t>préférés par contexte</a:t>
+            </a:r>
+          </a:p>
+          <a:p>
+            <a:pPr>
+              <a:spcAft>
+                <a:spcPts val="400"/>
+              </a:spcAft>
+              <a:defRPr sz="1300">
+                <a:solidFill>
+                  <a:srgbClr val="2B2B2B"/>
+                </a:solidFill>
+                <a:latin typeface="Calibri"/>
+              </a:defRPr>
+            </a:pPr>
+          </a:p>
+          <a:p>
+            <a:pPr>
+              <a:spcAft>
+                <a:spcPts val="400"/>
+              </a:spcAft>
+              <a:defRPr sz="1300">
+                <a:solidFill>
+                  <a:srgbClr val="2B2B2B"/>
+                </a:solidFill>
+                <a:latin typeface="Calibri"/>
+              </a:defRPr>
+            </a:pPr>
+            <a:r>
+              <a:t>Copilot Lab:</a:t>
+            </a:r>
+          </a:p>
+          <a:p>
+            <a:pPr>
+              <a:spcAft>
+                <a:spcPts val="400"/>
+              </a:spcAft>
+              <a:defRPr sz="1300">
+                <a:solidFill>
+                  <a:srgbClr val="2B2B2B"/>
+                </a:solidFill>
+                <a:latin typeface="Calibri"/>
+              </a:defRPr>
+            </a:pPr>
+            <a:r>
+              <a:t>copilot.cloud.microsoft/prompts</a:t>
             </a:r>
           </a:p>
         </p:txBody>
@@ -5668,20 +6044,56 @@
               </a:defRPr>
             </a:pPr>
             <a:r>
-              <a:t>Exemples concrets — Avant / Après</a:t>
-            </a:r>
-          </a:p>
-        </p:txBody>
-      </p:sp>
-      <p:sp>
-        <p:nvSpPr>
-          <p:cNvPr id="3" name="Rectangle 2"/>
+              <a:t>3 personas indispensables en institution financière</a:t>
+            </a:r>
+          </a:p>
+        </p:txBody>
+      </p:sp>
+      <p:sp>
+        <p:nvSpPr>
+          <p:cNvPr id="3" name="TextBox 2"/>
+          <p:cNvSpPr txBox="1"/>
+          <p:nvPr/>
+        </p:nvSpPr>
+        <p:spPr>
+          <a:xfrm>
+            <a:off x="457200" y="1005840"/>
+            <a:ext cx="10972800" cy="411480"/>
+          </a:xfrm>
+          <a:prstGeom prst="rect">
+            <a:avLst/>
+          </a:prstGeom>
+          <a:noFill/>
+        </p:spPr>
+        <p:txBody>
+          <a:bodyPr wrap="square" lIns="45720" rIns="45720" tIns="18288" bIns="18288">
+            <a:spAutoFit/>
+          </a:bodyPr>
+          <a:lstStyle/>
+          <a:p>
+            <a:pPr algn="l">
+              <a:defRPr sz="1500" b="0">
+                <a:solidFill>
+                  <a:srgbClr val="6B6B6B"/>
+                </a:solidFill>
+                <a:latin typeface="Calibri"/>
+              </a:defRPr>
+            </a:pPr>
+            <a:r>
+              <a:t>Pour chaque situation, le bon rôle</a:t>
+            </a:r>
+          </a:p>
+        </p:txBody>
+      </p:sp>
+      <p:sp>
+        <p:nvSpPr>
+          <p:cNvPr id="4" name="Rectangle 3"/>
           <p:cNvSpPr/>
           <p:nvPr/>
         </p:nvSpPr>
         <p:spPr>
           <a:xfrm>
-            <a:off x="457200" y="1234440"/>
+            <a:off x="457200" y="1508760"/>
             <a:ext cx="11274552" cy="18288"/>
           </a:xfrm>
           <a:prstGeom prst="rect">
@@ -5719,14 +6131,85 @@
       </p:sp>
       <p:sp>
         <p:nvSpPr>
-          <p:cNvPr id="4" name="Rectangle 3"/>
+          <p:cNvPr id="5" name="TextBox 4"/>
+          <p:cNvSpPr txBox="1"/>
+          <p:nvPr/>
+        </p:nvSpPr>
+        <p:spPr>
+          <a:xfrm>
+            <a:off x="457200" y="1737360"/>
+            <a:ext cx="10972800" cy="1188720"/>
+          </a:xfrm>
+          <a:prstGeom prst="rect">
+            <a:avLst/>
+          </a:prstGeom>
+          <a:noFill/>
+        </p:spPr>
+        <p:txBody>
+          <a:bodyPr wrap="square">
+            <a:spAutoFit/>
+          </a:bodyPr>
+          <a:lstStyle/>
+          <a:p>
+            <a:pPr>
+              <a:spcAft>
+                <a:spcPts val="400"/>
+              </a:spcAft>
+              <a:defRPr sz="1400">
+                <a:solidFill>
+                  <a:srgbClr val="2B2B2B"/>
+                </a:solidFill>
+                <a:latin typeface="Calibri"/>
+              </a:defRPr>
+            </a:pPr>
+            <a:r>
+              <a:t>• Ajoutez le persona au début du prompt</a:t>
+            </a:r>
+          </a:p>
+          <a:p>
+            <a:pPr>
+              <a:spcAft>
+                <a:spcPts val="400"/>
+              </a:spcAft>
+              <a:defRPr sz="1400">
+                <a:solidFill>
+                  <a:srgbClr val="2B2B2B"/>
+                </a:solidFill>
+                <a:latin typeface="Calibri"/>
+              </a:defRPr>
+            </a:pPr>
+            <a:r>
+              <a:t>• Combinez persona + contexte + tâche + format</a:t>
+            </a:r>
+          </a:p>
+          <a:p>
+            <a:pPr>
+              <a:spcAft>
+                <a:spcPts val="400"/>
+              </a:spcAft>
+              <a:defRPr sz="1400">
+                <a:solidFill>
+                  <a:srgbClr val="2B2B2B"/>
+                </a:solidFill>
+                <a:latin typeface="Calibri"/>
+              </a:defRPr>
+            </a:pPr>
+            <a:r>
+              <a:t>• Sauvegardez vos personas les plus utiles en Quick Parts</a:t>
+            </a:r>
+          </a:p>
+        </p:txBody>
+      </p:sp>
+      <p:sp>
+        <p:nvSpPr>
+          <p:cNvPr id="6" name="Rectangle 5"/>
           <p:cNvSpPr/>
           <p:nvPr/>
         </p:nvSpPr>
         <p:spPr>
           <a:xfrm>
-            <a:off x="457200" y="1463040"/>
-            <a:ext cx="5212080" cy="4754880"/>
+            <a:off x="457200" y="2926080"/>
+            <a:ext cx="3383280" cy="3291840"/>
           </a:xfrm>
           <a:prstGeom prst="rect">
             <a:avLst/>
@@ -5765,7 +6248,7 @@
       </p:sp>
       <p:pic>
         <p:nvPicPr>
-          <p:cNvPr id="5" name="Picture 4" descr="circle-x_EF4444_30.png"/>
+          <p:cNvPr id="7" name="Picture 6" descr="briefcase_00874E_30.png"/>
           <p:cNvPicPr>
             <a:picLocks noChangeAspect="1"/>
           </p:cNvPicPr>
@@ -5779,7 +6262,7 @@
         </p:blipFill>
         <p:spPr>
           <a:xfrm>
-            <a:off x="713232" y="1627632"/>
+            <a:off x="713232" y="3090672"/>
             <a:ext cx="292608" cy="292608"/>
           </a:xfrm>
           <a:prstGeom prst="rect">
@@ -5789,14 +6272,14 @@
       </p:pic>
       <p:sp>
         <p:nvSpPr>
-          <p:cNvPr id="6" name="TextBox 5"/>
+          <p:cNvPr id="8" name="TextBox 7"/>
           <p:cNvSpPr txBox="1"/>
           <p:nvPr/>
         </p:nvSpPr>
         <p:spPr>
           <a:xfrm>
-            <a:off x="1115568" y="1645920"/>
-            <a:ext cx="4370832" cy="457200"/>
+            <a:off x="1115568" y="3108960"/>
+            <a:ext cx="2542032" cy="457200"/>
           </a:xfrm>
           <a:prstGeom prst="rect">
             <a:avLst/>
@@ -5812,27 +6295,27 @@
             <a:pPr algn="l">
               <a:defRPr sz="1700" b="1">
                 <a:solidFill>
-                  <a:srgbClr val="EF4444"/>
-                </a:solidFill>
-                <a:latin typeface="Calibri"/>
-              </a:defRPr>
-            </a:pPr>
-            <a:r>
-              <a:t>AVANT — Sans persona</a:t>
-            </a:r>
-          </a:p>
-        </p:txBody>
-      </p:sp>
-      <p:sp>
-        <p:nvSpPr>
-          <p:cNvPr id="7" name="TextBox 6"/>
+                  <a:srgbClr val="00874E"/>
+                </a:solidFill>
+                <a:latin typeface="Calibri"/>
+              </a:defRPr>
+            </a:pPr>
+            <a:r>
+              <a:t>Persona professionnel</a:t>
+            </a:r>
+          </a:p>
+        </p:txBody>
+      </p:sp>
+      <p:sp>
+        <p:nvSpPr>
+          <p:cNvPr id="9" name="TextBox 8"/>
           <p:cNvSpPr txBox="1"/>
           <p:nvPr/>
         </p:nvSpPr>
         <p:spPr>
           <a:xfrm>
-            <a:off x="731520" y="2240280"/>
-            <a:ext cx="4663440" cy="3794760"/>
+            <a:off x="731520" y="3703320"/>
+            <a:ext cx="2834640" cy="2331720"/>
           </a:xfrm>
           <a:prstGeom prst="rect">
             <a:avLst/>
@@ -5857,7 +6340,7 @@
               </a:defRPr>
             </a:pPr>
             <a:r>
-              <a:t>«Draft a reply to this email»</a:t>
+              <a:t>«En tant que directeur</a:t>
             </a:r>
           </a:p>
           <a:p>
@@ -5872,6 +6355,9 @@
                 <a:latin typeface="Calibri"/>
               </a:defRPr>
             </a:pPr>
+            <a:r>
+              <a:t>de projet, réponds à ce</a:t>
+            </a:r>
           </a:p>
           <a:p>
             <a:pPr>
@@ -5886,21 +6372,82 @@
               </a:defRPr>
             </a:pPr>
             <a:r>
-              <a:t>→ Réponse générique, sans contexte. Temps perdu à réécrire.</a:t>
-            </a:r>
-          </a:p>
-        </p:txBody>
-      </p:sp>
-      <p:sp>
-        <p:nvSpPr>
-          <p:cNvPr id="8" name="Rectangle 7"/>
+              <a:t>partenaire d'affaires.</a:t>
+            </a:r>
+          </a:p>
+          <a:p>
+            <a:pPr>
+              <a:spcAft>
+                <a:spcPts val="400"/>
+              </a:spcAft>
+              <a:defRPr sz="1300">
+                <a:solidFill>
+                  <a:srgbClr val="2B2B2B"/>
+                </a:solidFill>
+                <a:latin typeface="Calibri"/>
+              </a:defRPr>
+            </a:pPr>
+            <a:r>
+              <a:t>Ton formel mais direct.»</a:t>
+            </a:r>
+          </a:p>
+          <a:p>
+            <a:pPr>
+              <a:spcAft>
+                <a:spcPts val="400"/>
+              </a:spcAft>
+              <a:defRPr sz="1300">
+                <a:solidFill>
+                  <a:srgbClr val="2B2B2B"/>
+                </a:solidFill>
+                <a:latin typeface="Calibri"/>
+              </a:defRPr>
+            </a:pPr>
+          </a:p>
+          <a:p>
+            <a:pPr>
+              <a:spcAft>
+                <a:spcPts val="400"/>
+              </a:spcAft>
+              <a:defRPr sz="1300">
+                <a:solidFill>
+                  <a:srgbClr val="2B2B2B"/>
+                </a:solidFill>
+                <a:latin typeface="Calibri"/>
+              </a:defRPr>
+            </a:pPr>
+            <a:r>
+              <a:t>Parfait pour clients,</a:t>
+            </a:r>
+          </a:p>
+          <a:p>
+            <a:pPr>
+              <a:spcAft>
+                <a:spcPts val="400"/>
+              </a:spcAft>
+              <a:defRPr sz="1300">
+                <a:solidFill>
+                  <a:srgbClr val="2B2B2B"/>
+                </a:solidFill>
+                <a:latin typeface="Calibri"/>
+              </a:defRPr>
+            </a:pPr>
+            <a:r>
+              <a:t>fournisseurs, partenaires</a:t>
+            </a:r>
+          </a:p>
+        </p:txBody>
+      </p:sp>
+      <p:sp>
+        <p:nvSpPr>
+          <p:cNvPr id="10" name="Rectangle 9"/>
           <p:cNvSpPr/>
           <p:nvPr/>
         </p:nvSpPr>
         <p:spPr>
           <a:xfrm>
-            <a:off x="5943600" y="1463040"/>
-            <a:ext cx="5212080" cy="4754880"/>
+            <a:off x="4114800" y="2926080"/>
+            <a:ext cx="3383280" cy="3291840"/>
           </a:xfrm>
           <a:prstGeom prst="rect">
             <a:avLst/>
@@ -5939,7 +6486,7 @@
       </p:sp>
       <p:pic>
         <p:nvPicPr>
-          <p:cNvPr id="9" name="Picture 8" descr="circle-check_00874E_30.png"/>
+          <p:cNvPr id="11" name="Picture 10" descr="shield-check_00874E_30.png"/>
           <p:cNvPicPr>
             <a:picLocks noChangeAspect="1"/>
           </p:cNvPicPr>
@@ -5953,7 +6500,7 @@
         </p:blipFill>
         <p:spPr>
           <a:xfrm>
-            <a:off x="6199632" y="1627632"/>
+            <a:off x="4370832" y="3090672"/>
             <a:ext cx="292608" cy="292608"/>
           </a:xfrm>
           <a:prstGeom prst="rect">
@@ -5963,14 +6510,14 @@
       </p:pic>
       <p:sp>
         <p:nvSpPr>
-          <p:cNvPr id="10" name="TextBox 9"/>
+          <p:cNvPr id="12" name="TextBox 11"/>
           <p:cNvSpPr txBox="1"/>
           <p:nvPr/>
         </p:nvSpPr>
         <p:spPr>
           <a:xfrm>
-            <a:off x="6601968" y="1645920"/>
-            <a:ext cx="4370831" cy="457200"/>
+            <a:off x="4773168" y="3108960"/>
+            <a:ext cx="2542031" cy="457200"/>
           </a:xfrm>
           <a:prstGeom prst="rect">
             <a:avLst/>
@@ -5992,21 +6539,21 @@
               </a:defRPr>
             </a:pPr>
             <a:r>
-              <a:t>APRÈS — Avec persona</a:t>
-            </a:r>
-          </a:p>
-        </p:txBody>
-      </p:sp>
-      <p:sp>
-        <p:nvSpPr>
-          <p:cNvPr id="11" name="TextBox 10"/>
+              <a:t>Persona conformité</a:t>
+            </a:r>
+          </a:p>
+        </p:txBody>
+      </p:sp>
+      <p:sp>
+        <p:nvSpPr>
+          <p:cNvPr id="13" name="TextBox 12"/>
           <p:cNvSpPr txBox="1"/>
           <p:nvPr/>
         </p:nvSpPr>
         <p:spPr>
           <a:xfrm>
-            <a:off x="6217920" y="2240280"/>
-            <a:ext cx="4663440" cy="3794760"/>
+            <a:off x="4389120" y="3703320"/>
+            <a:ext cx="2834640" cy="2331720"/>
           </a:xfrm>
           <a:prstGeom prst="rect">
             <a:avLst/>
@@ -6031,7 +6578,7 @@
               </a:defRPr>
             </a:pPr>
             <a:r>
-              <a:t>«As a senior project manager, draft a reply to this stakeholder. Propose a timeline.»</a:t>
+              <a:t>«En tant qu'agent de</a:t>
             </a:r>
           </a:p>
           <a:p>
@@ -6046,6 +6593,9 @@
                 <a:latin typeface="Calibri"/>
               </a:defRPr>
             </a:pPr>
+            <a:r>
+              <a:t>conformité réglementaire,</a:t>
+            </a:r>
           </a:p>
           <a:p>
             <a:pPr>
@@ -6060,30 +6610,93 @@
               </a:defRPr>
             </a:pPr>
             <a:r>
-              <a:t>→ Réponse ciblée, ton professionnel. Prêt à envoyer!</a:t>
-            </a:r>
-          </a:p>
-        </p:txBody>
-      </p:sp>
-      <p:sp>
-        <p:nvSpPr>
-          <p:cNvPr id="12" name="Rectangle 11"/>
+              <a:t>analyse cette procédure</a:t>
+            </a:r>
+          </a:p>
+          <a:p>
+            <a:pPr>
+              <a:spcAft>
+                <a:spcPts val="400"/>
+              </a:spcAft>
+              <a:defRPr sz="1300">
+                <a:solidFill>
+                  <a:srgbClr val="2B2B2B"/>
+                </a:solidFill>
+                <a:latin typeface="Calibri"/>
+              </a:defRPr>
+            </a:pPr>
+            <a:r>
+              <a:t>et identifie les écarts</a:t>
+            </a:r>
+          </a:p>
+          <a:p>
+            <a:pPr>
+              <a:spcAft>
+                <a:spcPts val="400"/>
+              </a:spcAft>
+              <a:defRPr sz="1300">
+                <a:solidFill>
+                  <a:srgbClr val="2B2B2B"/>
+                </a:solidFill>
+                <a:latin typeface="Calibri"/>
+              </a:defRPr>
+            </a:pPr>
+            <a:r>
+              <a:t>par rapport aux normes.»</a:t>
+            </a:r>
+          </a:p>
+          <a:p>
+            <a:pPr>
+              <a:spcAft>
+                <a:spcPts val="400"/>
+              </a:spcAft>
+              <a:defRPr sz="1300">
+                <a:solidFill>
+                  <a:srgbClr val="2B2B2B"/>
+                </a:solidFill>
+                <a:latin typeface="Calibri"/>
+              </a:defRPr>
+            </a:pPr>
+          </a:p>
+          <a:p>
+            <a:pPr>
+              <a:spcAft>
+                <a:spcPts val="400"/>
+              </a:spcAft>
+              <a:defRPr sz="1300">
+                <a:solidFill>
+                  <a:srgbClr val="2B2B2B"/>
+                </a:solidFill>
+                <a:latin typeface="Calibri"/>
+              </a:defRPr>
+            </a:pPr>
+            <a:r>
+              <a:t>Parfait pour audits, risques</a:t>
+            </a:r>
+          </a:p>
+        </p:txBody>
+      </p:sp>
+      <p:sp>
+        <p:nvSpPr>
+          <p:cNvPr id="14" name="Rectangle 13"/>
           <p:cNvSpPr/>
           <p:nvPr/>
         </p:nvSpPr>
         <p:spPr>
           <a:xfrm>
-            <a:off x="457200" y="6446520"/>
-            <a:ext cx="11274552" cy="13716"/>
+            <a:off x="7772400" y="2926080"/>
+            <a:ext cx="3383280" cy="3291840"/>
           </a:xfrm>
           <a:prstGeom prst="rect">
             <a:avLst/>
           </a:prstGeom>
           <a:solidFill>
-            <a:srgbClr val="00874E"/>
+            <a:srgbClr val="FFFFFF"/>
           </a:solidFill>
           <a:ln>
-            <a:noFill/>
+            <a:solidFill>
+              <a:srgbClr val="E0E0E0"/>
+            </a:solidFill>
           </a:ln>
           <a:effectLst/>
         </p:spPr>
@@ -6109,16 +6722,40 @@
           </a:p>
         </p:txBody>
       </p:sp>
-      <p:sp>
-        <p:nvSpPr>
-          <p:cNvPr id="13" name="TextBox 12"/>
+      <p:pic>
+        <p:nvPicPr>
+          <p:cNvPr id="15" name="Picture 14" descr="graduation-cap_F59E0B_30.png"/>
+          <p:cNvPicPr>
+            <a:picLocks noChangeAspect="1"/>
+          </p:cNvPicPr>
+          <p:nvPr/>
+        </p:nvPicPr>
+        <p:blipFill>
+          <a:blip r:embed="rId5"/>
+          <a:stretch>
+            <a:fillRect/>
+          </a:stretch>
+        </p:blipFill>
+        <p:spPr>
+          <a:xfrm>
+            <a:off x="8028431" y="3090672"/>
+            <a:ext cx="292608" cy="292608"/>
+          </a:xfrm>
+          <a:prstGeom prst="rect">
+            <a:avLst/>
+          </a:prstGeom>
+        </p:spPr>
+      </p:pic>
+      <p:sp>
+        <p:nvSpPr>
+          <p:cNvPr id="16" name="TextBox 15"/>
           <p:cNvSpPr txBox="1"/>
           <p:nvPr/>
         </p:nvSpPr>
         <p:spPr>
           <a:xfrm>
-            <a:off x="457200" y="6537960"/>
-            <a:ext cx="5486400" cy="274320"/>
+            <a:off x="8430767" y="3108960"/>
+            <a:ext cx="2542032" cy="457200"/>
           </a:xfrm>
           <a:prstGeom prst="rect">
             <a:avLst/>
@@ -6132,6 +6769,218 @@
           <a:lstStyle/>
           <a:p>
             <a:pPr algn="l">
+              <a:defRPr sz="1700" b="1">
+                <a:solidFill>
+                  <a:srgbClr val="F59E0B"/>
+                </a:solidFill>
+                <a:latin typeface="Calibri"/>
+              </a:defRPr>
+            </a:pPr>
+            <a:r>
+              <a:t>Persona vulgarisateur</a:t>
+            </a:r>
+          </a:p>
+        </p:txBody>
+      </p:sp>
+      <p:sp>
+        <p:nvSpPr>
+          <p:cNvPr id="17" name="TextBox 16"/>
+          <p:cNvSpPr txBox="1"/>
+          <p:nvPr/>
+        </p:nvSpPr>
+        <p:spPr>
+          <a:xfrm>
+            <a:off x="8046720" y="3703320"/>
+            <a:ext cx="2834640" cy="2331720"/>
+          </a:xfrm>
+          <a:prstGeom prst="rect">
+            <a:avLst/>
+          </a:prstGeom>
+          <a:noFill/>
+        </p:spPr>
+        <p:txBody>
+          <a:bodyPr wrap="square">
+            <a:spAutoFit/>
+          </a:bodyPr>
+          <a:lstStyle/>
+          <a:p>
+            <a:pPr>
+              <a:spcAft>
+                <a:spcPts val="400"/>
+              </a:spcAft>
+              <a:defRPr sz="1300">
+                <a:solidFill>
+                  <a:srgbClr val="2B2B2B"/>
+                </a:solidFill>
+                <a:latin typeface="Calibri"/>
+              </a:defRPr>
+            </a:pPr>
+            <a:r>
+              <a:t>«En tant que formateur,</a:t>
+            </a:r>
+          </a:p>
+          <a:p>
+            <a:pPr>
+              <a:spcAft>
+                <a:spcPts val="400"/>
+              </a:spcAft>
+              <a:defRPr sz="1300">
+                <a:solidFill>
+                  <a:srgbClr val="2B2B2B"/>
+                </a:solidFill>
+                <a:latin typeface="Calibri"/>
+              </a:defRPr>
+            </a:pPr>
+            <a:r>
+              <a:t>explique ce concept</a:t>
+            </a:r>
+          </a:p>
+          <a:p>
+            <a:pPr>
+              <a:spcAft>
+                <a:spcPts val="400"/>
+              </a:spcAft>
+              <a:defRPr sz="1300">
+                <a:solidFill>
+                  <a:srgbClr val="2B2B2B"/>
+                </a:solidFill>
+                <a:latin typeface="Calibri"/>
+              </a:defRPr>
+            </a:pPr>
+            <a:r>
+              <a:t>technique simplement.</a:t>
+            </a:r>
+          </a:p>
+          <a:p>
+            <a:pPr>
+              <a:spcAft>
+                <a:spcPts val="400"/>
+              </a:spcAft>
+              <a:defRPr sz="1300">
+                <a:solidFill>
+                  <a:srgbClr val="2B2B2B"/>
+                </a:solidFill>
+                <a:latin typeface="Calibri"/>
+              </a:defRPr>
+            </a:pPr>
+            <a:r>
+              <a:t>Pas de jargon.</a:t>
+            </a:r>
+          </a:p>
+          <a:p>
+            <a:pPr>
+              <a:spcAft>
+                <a:spcPts val="400"/>
+              </a:spcAft>
+              <a:defRPr sz="1300">
+                <a:solidFill>
+                  <a:srgbClr val="2B2B2B"/>
+                </a:solidFill>
+                <a:latin typeface="Calibri"/>
+              </a:defRPr>
+            </a:pPr>
+            <a:r>
+              <a:t>Public non-TI.»</a:t>
+            </a:r>
+          </a:p>
+          <a:p>
+            <a:pPr>
+              <a:spcAft>
+                <a:spcPts val="400"/>
+              </a:spcAft>
+              <a:defRPr sz="1300">
+                <a:solidFill>
+                  <a:srgbClr val="2B2B2B"/>
+                </a:solidFill>
+                <a:latin typeface="Calibri"/>
+              </a:defRPr>
+            </a:pPr>
+          </a:p>
+          <a:p>
+            <a:pPr>
+              <a:spcAft>
+                <a:spcPts val="400"/>
+              </a:spcAft>
+              <a:defRPr sz="1300">
+                <a:solidFill>
+                  <a:srgbClr val="2B2B2B"/>
+                </a:solidFill>
+                <a:latin typeface="Calibri"/>
+              </a:defRPr>
+            </a:pPr>
+            <a:r>
+              <a:t>Parfait pour IT vers non-IT</a:t>
+            </a:r>
+          </a:p>
+        </p:txBody>
+      </p:sp>
+      <p:sp>
+        <p:nvSpPr>
+          <p:cNvPr id="18" name="Rectangle 17"/>
+          <p:cNvSpPr/>
+          <p:nvPr/>
+        </p:nvSpPr>
+        <p:spPr>
+          <a:xfrm>
+            <a:off x="457200" y="6446520"/>
+            <a:ext cx="11274552" cy="13716"/>
+          </a:xfrm>
+          <a:prstGeom prst="rect">
+            <a:avLst/>
+          </a:prstGeom>
+          <a:solidFill>
+            <a:srgbClr val="00874E"/>
+          </a:solidFill>
+          <a:ln>
+            <a:noFill/>
+          </a:ln>
+          <a:effectLst/>
+        </p:spPr>
+        <p:style>
+          <a:lnRef idx="1">
+            <a:schemeClr val="accent1"/>
+          </a:lnRef>
+          <a:fillRef idx="3">
+            <a:schemeClr val="accent1"/>
+          </a:fillRef>
+          <a:effectRef idx="2">
+            <a:schemeClr val="accent1"/>
+          </a:effectRef>
+          <a:fontRef idx="minor">
+            <a:schemeClr val="lt1"/>
+          </a:fontRef>
+        </p:style>
+        <p:txBody>
+          <a:bodyPr rtlCol="0" anchor="ctr"/>
+          <a:lstStyle/>
+          <a:p>
+            <a:pPr algn="ctr"/>
+          </a:p>
+        </p:txBody>
+      </p:sp>
+      <p:sp>
+        <p:nvSpPr>
+          <p:cNvPr id="19" name="TextBox 18"/>
+          <p:cNvSpPr txBox="1"/>
+          <p:nvPr/>
+        </p:nvSpPr>
+        <p:spPr>
+          <a:xfrm>
+            <a:off x="457200" y="6537960"/>
+            <a:ext cx="5486400" cy="274320"/>
+          </a:xfrm>
+          <a:prstGeom prst="rect">
+            <a:avLst/>
+          </a:prstGeom>
+          <a:noFill/>
+        </p:spPr>
+        <p:txBody>
+          <a:bodyPr wrap="square" lIns="45720" rIns="45720" tIns="18288" bIns="18288">
+            <a:spAutoFit/>
+          </a:bodyPr>
+          <a:lstStyle/>
+          <a:p>
+            <a:pPr algn="l">
               <a:defRPr sz="1000" b="0">
                 <a:solidFill>
                   <a:srgbClr val="6B6B6B"/>
@@ -6147,7 +6996,7 @@
       </p:sp>
       <p:sp>
         <p:nvSpPr>
-          <p:cNvPr id="14" name="TextBox 13"/>
+          <p:cNvPr id="20" name="TextBox 19"/>
           <p:cNvSpPr txBox="1"/>
           <p:nvPr/>
         </p:nvSpPr>
@@ -6238,56 +7087,20 @@
               </a:defRPr>
             </a:pPr>
             <a:r>
-              <a:t>La recette: Persona + Contexte + Tâche + Format</a:t>
-            </a:r>
-          </a:p>
-        </p:txBody>
-      </p:sp>
-      <p:sp>
-        <p:nvSpPr>
-          <p:cNvPr id="3" name="TextBox 2"/>
-          <p:cNvSpPr txBox="1"/>
-          <p:nvPr/>
-        </p:nvSpPr>
-        <p:spPr>
-          <a:xfrm>
-            <a:off x="457200" y="1005840"/>
-            <a:ext cx="10972800" cy="411480"/>
-          </a:xfrm>
-          <a:prstGeom prst="rect">
-            <a:avLst/>
-          </a:prstGeom>
-          <a:noFill/>
-        </p:spPr>
-        <p:txBody>
-          <a:bodyPr wrap="square" lIns="45720" rIns="45720" tIns="18288" bIns="18288">
-            <a:spAutoFit/>
-          </a:bodyPr>
-          <a:lstStyle/>
-          <a:p>
-            <a:pPr algn="l">
-              <a:defRPr sz="1500" b="0">
-                <a:solidFill>
-                  <a:srgbClr val="6B6B6B"/>
-                </a:solidFill>
-                <a:latin typeface="Calibri"/>
-              </a:defRPr>
-            </a:pPr>
-            <a:r>
-              <a:t>La formule magique du prompt parfait</a:t>
-            </a:r>
-          </a:p>
-        </p:txBody>
-      </p:sp>
-      <p:sp>
-        <p:nvSpPr>
-          <p:cNvPr id="4" name="Rectangle 3"/>
+              <a:t>Avant / Après — Le persona en action</a:t>
+            </a:r>
+          </a:p>
+        </p:txBody>
+      </p:sp>
+      <p:sp>
+        <p:nvSpPr>
+          <p:cNvPr id="3" name="Rectangle 2"/>
           <p:cNvSpPr/>
           <p:nvPr/>
         </p:nvSpPr>
         <p:spPr>
           <a:xfrm>
-            <a:off x="457200" y="1508760"/>
+            <a:off x="457200" y="1234440"/>
             <a:ext cx="11274552" cy="18288"/>
           </a:xfrm>
           <a:prstGeom prst="rect">
@@ -6325,101 +7138,14 @@
       </p:sp>
       <p:sp>
         <p:nvSpPr>
-          <p:cNvPr id="5" name="TextBox 4"/>
-          <p:cNvSpPr txBox="1"/>
-          <p:nvPr/>
-        </p:nvSpPr>
-        <p:spPr>
-          <a:xfrm>
-            <a:off x="457200" y="1737360"/>
-            <a:ext cx="10972800" cy="1188720"/>
-          </a:xfrm>
-          <a:prstGeom prst="rect">
-            <a:avLst/>
-          </a:prstGeom>
-          <a:noFill/>
-        </p:spPr>
-        <p:txBody>
-          <a:bodyPr wrap="square">
-            <a:spAutoFit/>
-          </a:bodyPr>
-          <a:lstStyle/>
-          <a:p>
-            <a:pPr>
-              <a:spcAft>
-                <a:spcPts val="400"/>
-              </a:spcAft>
-              <a:defRPr sz="1400">
-                <a:solidFill>
-                  <a:srgbClr val="2B2B2B"/>
-                </a:solidFill>
-                <a:latin typeface="Calibri"/>
-              </a:defRPr>
-            </a:pPr>
-            <a:r>
-              <a:t>• Persona: Qui es-tu? (chef de projet, développeur, formateur...)</a:t>
-            </a:r>
-          </a:p>
-          <a:p>
-            <a:pPr>
-              <a:spcAft>
-                <a:spcPts val="400"/>
-              </a:spcAft>
-              <a:defRPr sz="1400">
-                <a:solidFill>
-                  <a:srgbClr val="2B2B2B"/>
-                </a:solidFill>
-                <a:latin typeface="Calibri"/>
-              </a:defRPr>
-            </a:pPr>
-            <a:r>
-              <a:t>• Contexte: De quoi parlons-nous? (ce courriel, ce client...)</a:t>
-            </a:r>
-          </a:p>
-          <a:p>
-            <a:pPr>
-              <a:spcAft>
-                <a:spcPts val="400"/>
-              </a:spcAft>
-              <a:defRPr sz="1400">
-                <a:solidFill>
-                  <a:srgbClr val="2B2B2B"/>
-                </a:solidFill>
-                <a:latin typeface="Calibri"/>
-              </a:defRPr>
-            </a:pPr>
-            <a:r>
-              <a:t>• Tâche: Que veux-tu? (résumer, rédiger, analyser...)</a:t>
-            </a:r>
-          </a:p>
-          <a:p>
-            <a:pPr>
-              <a:spcAft>
-                <a:spcPts val="400"/>
-              </a:spcAft>
-              <a:defRPr sz="1400">
-                <a:solidFill>
-                  <a:srgbClr val="2B2B2B"/>
-                </a:solidFill>
-                <a:latin typeface="Calibri"/>
-              </a:defRPr>
-            </a:pPr>
-            <a:r>
-              <a:t>• Format: Comment? (3 puces, tableau, courriel formel...)</a:t>
-            </a:r>
-          </a:p>
-        </p:txBody>
-      </p:sp>
-      <p:sp>
-        <p:nvSpPr>
-          <p:cNvPr id="6" name="Rectangle 5"/>
+          <p:cNvPr id="4" name="Rectangle 3"/>
           <p:cNvSpPr/>
           <p:nvPr/>
         </p:nvSpPr>
         <p:spPr>
           <a:xfrm>
-            <a:off x="457200" y="2926080"/>
-            <a:ext cx="3383280" cy="3291840"/>
+            <a:off x="457200" y="1463040"/>
+            <a:ext cx="5212080" cy="4754880"/>
           </a:xfrm>
           <a:prstGeom prst="rect">
             <a:avLst/>
@@ -6458,7 +7184,7 @@
       </p:sp>
       <p:pic>
         <p:nvPicPr>
-          <p:cNvPr id="7" name="Picture 6" descr="layout-template_00874E_30.png"/>
+          <p:cNvPr id="5" name="Picture 4" descr="circle-x_EF4444_30.png"/>
           <p:cNvPicPr>
             <a:picLocks noChangeAspect="1"/>
           </p:cNvPicPr>
@@ -6472,7 +7198,7 @@
         </p:blipFill>
         <p:spPr>
           <a:xfrm>
-            <a:off x="713232" y="3090672"/>
+            <a:off x="713232" y="1627632"/>
             <a:ext cx="292608" cy="292608"/>
           </a:xfrm>
           <a:prstGeom prst="rect">
@@ -6482,14 +7208,14 @@
       </p:pic>
       <p:sp>
         <p:nvSpPr>
-          <p:cNvPr id="8" name="TextBox 7"/>
+          <p:cNvPr id="6" name="TextBox 5"/>
           <p:cNvSpPr txBox="1"/>
           <p:nvPr/>
         </p:nvSpPr>
         <p:spPr>
           <a:xfrm>
-            <a:off x="1115568" y="3108960"/>
-            <a:ext cx="2542032" cy="457200"/>
+            <a:off x="1115568" y="1645920"/>
+            <a:ext cx="4370832" cy="457200"/>
           </a:xfrm>
           <a:prstGeom prst="rect">
             <a:avLst/>
@@ -6505,27 +7231,27 @@
             <a:pPr algn="l">
               <a:defRPr sz="1700" b="1">
                 <a:solidFill>
-                  <a:srgbClr val="00874E"/>
-                </a:solidFill>
-                <a:latin typeface="Calibri"/>
-              </a:defRPr>
-            </a:pPr>
-            <a:r>
-              <a:t>Template universel</a:t>
-            </a:r>
-          </a:p>
-        </p:txBody>
-      </p:sp>
-      <p:sp>
-        <p:nvSpPr>
-          <p:cNvPr id="9" name="TextBox 8"/>
+                  <a:srgbClr val="EF4444"/>
+                </a:solidFill>
+                <a:latin typeface="Calibri"/>
+              </a:defRPr>
+            </a:pPr>
+            <a:r>
+              <a:t>AVANT — Sans persona</a:t>
+            </a:r>
+          </a:p>
+        </p:txBody>
+      </p:sp>
+      <p:sp>
+        <p:nvSpPr>
+          <p:cNvPr id="7" name="TextBox 6"/>
           <p:cNvSpPr txBox="1"/>
           <p:nvPr/>
         </p:nvSpPr>
         <p:spPr>
           <a:xfrm>
-            <a:off x="731520" y="3703320"/>
-            <a:ext cx="2834640" cy="2331720"/>
+            <a:off x="731520" y="2240280"/>
+            <a:ext cx="4663440" cy="3794760"/>
           </a:xfrm>
           <a:prstGeom prst="rect">
             <a:avLst/>
@@ -6550,21 +7276,98 @@
               </a:defRPr>
             </a:pPr>
             <a:r>
-              <a:t>«En tant que [persona], dans le contexte de [sujet], [action] en [format].»</a:t>
-            </a:r>
-          </a:p>
-        </p:txBody>
-      </p:sp>
-      <p:sp>
-        <p:nvSpPr>
-          <p:cNvPr id="10" name="Rectangle 9"/>
+              <a:t>«Résume ce fil de courriels»</a:t>
+            </a:r>
+          </a:p>
+          <a:p>
+            <a:pPr>
+              <a:spcAft>
+                <a:spcPts val="400"/>
+              </a:spcAft>
+              <a:defRPr sz="1300">
+                <a:solidFill>
+                  <a:srgbClr val="2B2B2B"/>
+                </a:solidFill>
+                <a:latin typeface="Calibri"/>
+              </a:defRPr>
+            </a:pPr>
+          </a:p>
+          <a:p>
+            <a:pPr>
+              <a:spcAft>
+                <a:spcPts val="400"/>
+              </a:spcAft>
+              <a:defRPr sz="1300">
+                <a:solidFill>
+                  <a:srgbClr val="2B2B2B"/>
+                </a:solidFill>
+                <a:latin typeface="Calibri"/>
+              </a:defRPr>
+            </a:pPr>
+            <a:r>
+              <a:t>→ Résumé générique,</a:t>
+            </a:r>
+          </a:p>
+          <a:p>
+            <a:pPr>
+              <a:spcAft>
+                <a:spcPts val="400"/>
+              </a:spcAft>
+              <a:defRPr sz="1300">
+                <a:solidFill>
+                  <a:srgbClr val="2B2B2B"/>
+                </a:solidFill>
+                <a:latin typeface="Calibri"/>
+              </a:defRPr>
+            </a:pPr>
+            <a:r>
+              <a:t>liste de faits sans</a:t>
+            </a:r>
+          </a:p>
+          <a:p>
+            <a:pPr>
+              <a:spcAft>
+                <a:spcPts val="400"/>
+              </a:spcAft>
+              <a:defRPr sz="1300">
+                <a:solidFill>
+                  <a:srgbClr val="2B2B2B"/>
+                </a:solidFill>
+                <a:latin typeface="Calibri"/>
+              </a:defRPr>
+            </a:pPr>
+            <a:r>
+              <a:t>priorisation.</a:t>
+            </a:r>
+          </a:p>
+          <a:p>
+            <a:pPr>
+              <a:spcAft>
+                <a:spcPts val="400"/>
+              </a:spcAft>
+              <a:defRPr sz="1300">
+                <a:solidFill>
+                  <a:srgbClr val="2B2B2B"/>
+                </a:solidFill>
+                <a:latin typeface="Calibri"/>
+              </a:defRPr>
+            </a:pPr>
+            <a:r>
+              <a:t>Temps perdu à réécrire.</a:t>
+            </a:r>
+          </a:p>
+        </p:txBody>
+      </p:sp>
+      <p:sp>
+        <p:nvSpPr>
+          <p:cNvPr id="8" name="Rectangle 7"/>
           <p:cNvSpPr/>
           <p:nvPr/>
         </p:nvSpPr>
         <p:spPr>
           <a:xfrm>
-            <a:off x="4114800" y="2926080"/>
-            <a:ext cx="3383280" cy="3291840"/>
+            <a:off x="5943600" y="1463040"/>
+            <a:ext cx="5212080" cy="4754880"/>
           </a:xfrm>
           <a:prstGeom prst="rect">
             <a:avLst/>
@@ -6603,7 +7406,7 @@
       </p:sp>
       <p:pic>
         <p:nvPicPr>
-          <p:cNvPr id="11" name="Picture 10" descr="file-text_00874E_30.png"/>
+          <p:cNvPr id="9" name="Picture 8" descr="circle-check_00874E_30.png"/>
           <p:cNvPicPr>
             <a:picLocks noChangeAspect="1"/>
           </p:cNvPicPr>
@@ -6617,7 +7420,7 @@
         </p:blipFill>
         <p:spPr>
           <a:xfrm>
-            <a:off x="4370832" y="3090672"/>
+            <a:off x="6199632" y="1627632"/>
             <a:ext cx="292608" cy="292608"/>
           </a:xfrm>
           <a:prstGeom prst="rect">
@@ -6627,14 +7430,14 @@
       </p:pic>
       <p:sp>
         <p:nvSpPr>
-          <p:cNvPr id="12" name="TextBox 11"/>
+          <p:cNvPr id="10" name="TextBox 9"/>
           <p:cNvSpPr txBox="1"/>
           <p:nvPr/>
         </p:nvSpPr>
         <p:spPr>
           <a:xfrm>
-            <a:off x="4773168" y="3108960"/>
-            <a:ext cx="2542031" cy="457200"/>
+            <a:off x="6601968" y="1645920"/>
+            <a:ext cx="4370831" cy="457200"/>
           </a:xfrm>
           <a:prstGeom prst="rect">
             <a:avLst/>
@@ -6656,21 +7459,21 @@
               </a:defRPr>
             </a:pPr>
             <a:r>
-              <a:t>Exemple</a:t>
-            </a:r>
-          </a:p>
-        </p:txBody>
-      </p:sp>
-      <p:sp>
-        <p:nvSpPr>
-          <p:cNvPr id="13" name="TextBox 12"/>
+              <a:t>APRÈS — Avec persona</a:t>
+            </a:r>
+          </a:p>
+        </p:txBody>
+      </p:sp>
+      <p:sp>
+        <p:nvSpPr>
+          <p:cNvPr id="11" name="TextBox 10"/>
           <p:cNvSpPr txBox="1"/>
           <p:nvPr/>
         </p:nvSpPr>
         <p:spPr>
           <a:xfrm>
-            <a:off x="4389120" y="3703320"/>
-            <a:ext cx="2834640" cy="2331720"/>
+            <a:off x="6217920" y="2240280"/>
+            <a:ext cx="4663440" cy="3794760"/>
           </a:xfrm>
           <a:prstGeom prst="rect">
             <a:avLst/>
@@ -6695,32 +7498,139 @@
               </a:defRPr>
             </a:pPr>
             <a:r>
-              <a:t>«En tant que chef de projet, dans le cadre du projet Alpha, résume l'avancement en 3 puces.»</a:t>
-            </a:r>
-          </a:p>
-        </p:txBody>
-      </p:sp>
-      <p:sp>
-        <p:nvSpPr>
-          <p:cNvPr id="14" name="Rectangle 13"/>
+              <a:t>«En tant que chef de projet</a:t>
+            </a:r>
+          </a:p>
+          <a:p>
+            <a:pPr>
+              <a:spcAft>
+                <a:spcPts val="400"/>
+              </a:spcAft>
+              <a:defRPr sz="1300">
+                <a:solidFill>
+                  <a:srgbClr val="2B2B2B"/>
+                </a:solidFill>
+                <a:latin typeface="Calibri"/>
+              </a:defRPr>
+            </a:pPr>
+            <a:r>
+              <a:t>senior, résume ce fil et</a:t>
+            </a:r>
+          </a:p>
+          <a:p>
+            <a:pPr>
+              <a:spcAft>
+                <a:spcPts val="400"/>
+              </a:spcAft>
+              <a:defRPr sz="1300">
+                <a:solidFill>
+                  <a:srgbClr val="2B2B2B"/>
+                </a:solidFill>
+                <a:latin typeface="Calibri"/>
+              </a:defRPr>
+            </a:pPr>
+            <a:r>
+              <a:t>identifie les risques pour</a:t>
+            </a:r>
+          </a:p>
+          <a:p>
+            <a:pPr>
+              <a:spcAft>
+                <a:spcPts val="400"/>
+              </a:spcAft>
+              <a:defRPr sz="1300">
+                <a:solidFill>
+                  <a:srgbClr val="2B2B2B"/>
+                </a:solidFill>
+                <a:latin typeface="Calibri"/>
+              </a:defRPr>
+            </a:pPr>
+            <a:r>
+              <a:t>la livraison du trimestre.»</a:t>
+            </a:r>
+          </a:p>
+          <a:p>
+            <a:pPr>
+              <a:spcAft>
+                <a:spcPts val="400"/>
+              </a:spcAft>
+              <a:defRPr sz="1300">
+                <a:solidFill>
+                  <a:srgbClr val="2B2B2B"/>
+                </a:solidFill>
+                <a:latin typeface="Calibri"/>
+              </a:defRPr>
+            </a:pPr>
+          </a:p>
+          <a:p>
+            <a:pPr>
+              <a:spcAft>
+                <a:spcPts val="400"/>
+              </a:spcAft>
+              <a:defRPr sz="1300">
+                <a:solidFill>
+                  <a:srgbClr val="2B2B2B"/>
+                </a:solidFill>
+                <a:latin typeface="Calibri"/>
+              </a:defRPr>
+            </a:pPr>
+            <a:r>
+              <a:t>→ Risques ciblés,</a:t>
+            </a:r>
+          </a:p>
+          <a:p>
+            <a:pPr>
+              <a:spcAft>
+                <a:spcPts val="400"/>
+              </a:spcAft>
+              <a:defRPr sz="1300">
+                <a:solidFill>
+                  <a:srgbClr val="2B2B2B"/>
+                </a:solidFill>
+                <a:latin typeface="Calibri"/>
+              </a:defRPr>
+            </a:pPr>
+            <a:r>
+              <a:t>ton professionnel.</a:t>
+            </a:r>
+          </a:p>
+          <a:p>
+            <a:pPr>
+              <a:spcAft>
+                <a:spcPts val="400"/>
+              </a:spcAft>
+              <a:defRPr sz="1300">
+                <a:solidFill>
+                  <a:srgbClr val="2B2B2B"/>
+                </a:solidFill>
+                <a:latin typeface="Calibri"/>
+              </a:defRPr>
+            </a:pPr>
+            <a:r>
+              <a:t>Prêt à partager.</a:t>
+            </a:r>
+          </a:p>
+        </p:txBody>
+      </p:sp>
+      <p:sp>
+        <p:nvSpPr>
+          <p:cNvPr id="12" name="Rectangle 11"/>
           <p:cNvSpPr/>
           <p:nvPr/>
         </p:nvSpPr>
         <p:spPr>
           <a:xfrm>
-            <a:off x="7772400" y="2926080"/>
-            <a:ext cx="3383280" cy="3291840"/>
+            <a:off x="457200" y="6446520"/>
+            <a:ext cx="11274552" cy="13716"/>
           </a:xfrm>
           <a:prstGeom prst="rect">
             <a:avLst/>
           </a:prstGeom>
           <a:solidFill>
-            <a:srgbClr val="FFFFFF"/>
+            <a:srgbClr val="00874E"/>
           </a:solidFill>
           <a:ln>
-            <a:solidFill>
-              <a:srgbClr val="E0E0E0"/>
-            </a:solidFill>
+            <a:noFill/>
           </a:ln>
           <a:effectLst/>
         </p:spPr>
@@ -6746,40 +7656,16 @@
           </a:p>
         </p:txBody>
       </p:sp>
-      <p:pic>
-        <p:nvPicPr>
-          <p:cNvPr id="15" name="Picture 14" descr="save_F59E0B_30.png"/>
-          <p:cNvPicPr>
-            <a:picLocks noChangeAspect="1"/>
-          </p:cNvPicPr>
-          <p:nvPr/>
-        </p:nvPicPr>
-        <p:blipFill>
-          <a:blip r:embed="rId5"/>
-          <a:stretch>
-            <a:fillRect/>
-          </a:stretch>
-        </p:blipFill>
-        <p:spPr>
-          <a:xfrm>
-            <a:off x="8028431" y="3090672"/>
-            <a:ext cx="292608" cy="292608"/>
-          </a:xfrm>
-          <a:prstGeom prst="rect">
-            <a:avLst/>
-          </a:prstGeom>
-        </p:spPr>
-      </p:pic>
-      <p:sp>
-        <p:nvSpPr>
-          <p:cNvPr id="16" name="TextBox 15"/>
+      <p:sp>
+        <p:nvSpPr>
+          <p:cNvPr id="13" name="TextBox 12"/>
           <p:cNvSpPr txBox="1"/>
           <p:nvPr/>
         </p:nvSpPr>
         <p:spPr>
           <a:xfrm>
-            <a:off x="8430767" y="3108960"/>
-            <a:ext cx="2542032" cy="457200"/>
+            <a:off x="457200" y="6537960"/>
+            <a:ext cx="5486400" cy="274320"/>
           </a:xfrm>
           <a:prstGeom prst="rect">
             <a:avLst/>
@@ -6793,157 +7679,6 @@
           <a:lstStyle/>
           <a:p>
             <a:pPr algn="l">
-              <a:defRPr sz="1700" b="1">
-                <a:solidFill>
-                  <a:srgbClr val="F59E0B"/>
-                </a:solidFill>
-                <a:latin typeface="Calibri"/>
-              </a:defRPr>
-            </a:pPr>
-            <a:r>
-              <a:t>Sauvegarder</a:t>
-            </a:r>
-          </a:p>
-        </p:txBody>
-      </p:sp>
-      <p:sp>
-        <p:nvSpPr>
-          <p:cNvPr id="17" name="TextBox 16"/>
-          <p:cNvSpPr txBox="1"/>
-          <p:nvPr/>
-        </p:nvSpPr>
-        <p:spPr>
-          <a:xfrm>
-            <a:off x="8046720" y="3703320"/>
-            <a:ext cx="2834640" cy="2331720"/>
-          </a:xfrm>
-          <a:prstGeom prst="rect">
-            <a:avLst/>
-          </a:prstGeom>
-          <a:noFill/>
-        </p:spPr>
-        <p:txBody>
-          <a:bodyPr wrap="square">
-            <a:spAutoFit/>
-          </a:bodyPr>
-          <a:lstStyle/>
-          <a:p>
-            <a:pPr>
-              <a:spcAft>
-                <a:spcPts val="400"/>
-              </a:spcAft>
-              <a:defRPr sz="1300">
-                <a:solidFill>
-                  <a:srgbClr val="2B2B2B"/>
-                </a:solidFill>
-                <a:latin typeface="Calibri"/>
-              </a:defRPr>
-            </a:pPr>
-            <a:r>
-              <a:t>Quick Parts: votre template</a:t>
-            </a:r>
-          </a:p>
-          <a:p>
-            <a:pPr>
-              <a:spcAft>
-                <a:spcPts val="400"/>
-              </a:spcAft>
-              <a:defRPr sz="1300">
-                <a:solidFill>
-                  <a:srgbClr val="2B2B2B"/>
-                </a:solidFill>
-                <a:latin typeface="Calibri"/>
-              </a:defRPr>
-            </a:pPr>
-            <a:r>
-              <a:t>OneNote: vos personas préférés</a:t>
-            </a:r>
-          </a:p>
-          <a:p>
-            <a:pPr>
-              <a:spcAft>
-                <a:spcPts val="400"/>
-              </a:spcAft>
-              <a:defRPr sz="1300">
-                <a:solidFill>
-                  <a:srgbClr val="2B2B2B"/>
-                </a:solidFill>
-                <a:latin typeface="Calibri"/>
-              </a:defRPr>
-            </a:pPr>
-            <a:r>
-              <a:t>Copilot Lab: copilot.cloud.microsoft/prompts</a:t>
-            </a:r>
-          </a:p>
-        </p:txBody>
-      </p:sp>
-      <p:sp>
-        <p:nvSpPr>
-          <p:cNvPr id="18" name="Rectangle 17"/>
-          <p:cNvSpPr/>
-          <p:nvPr/>
-        </p:nvSpPr>
-        <p:spPr>
-          <a:xfrm>
-            <a:off x="457200" y="6446520"/>
-            <a:ext cx="11274552" cy="13716"/>
-          </a:xfrm>
-          <a:prstGeom prst="rect">
-            <a:avLst/>
-          </a:prstGeom>
-          <a:solidFill>
-            <a:srgbClr val="00874E"/>
-          </a:solidFill>
-          <a:ln>
-            <a:noFill/>
-          </a:ln>
-          <a:effectLst/>
-        </p:spPr>
-        <p:style>
-          <a:lnRef idx="1">
-            <a:schemeClr val="accent1"/>
-          </a:lnRef>
-          <a:fillRef idx="3">
-            <a:schemeClr val="accent1"/>
-          </a:fillRef>
-          <a:effectRef idx="2">
-            <a:schemeClr val="accent1"/>
-          </a:effectRef>
-          <a:fontRef idx="minor">
-            <a:schemeClr val="lt1"/>
-          </a:fontRef>
-        </p:style>
-        <p:txBody>
-          <a:bodyPr rtlCol="0" anchor="ctr"/>
-          <a:lstStyle/>
-          <a:p>
-            <a:pPr algn="ctr"/>
-          </a:p>
-        </p:txBody>
-      </p:sp>
-      <p:sp>
-        <p:nvSpPr>
-          <p:cNvPr id="19" name="TextBox 18"/>
-          <p:cNvSpPr txBox="1"/>
-          <p:nvPr/>
-        </p:nvSpPr>
-        <p:spPr>
-          <a:xfrm>
-            <a:off x="457200" y="6537960"/>
-            <a:ext cx="5486400" cy="274320"/>
-          </a:xfrm>
-          <a:prstGeom prst="rect">
-            <a:avLst/>
-          </a:prstGeom>
-          <a:noFill/>
-        </p:spPr>
-        <p:txBody>
-          <a:bodyPr wrap="square" lIns="45720" rIns="45720" tIns="18288" bIns="18288">
-            <a:spAutoFit/>
-          </a:bodyPr>
-          <a:lstStyle/>
-          <a:p>
-            <a:pPr algn="l">
               <a:defRPr sz="1000" b="0">
                 <a:solidFill>
                   <a:srgbClr val="6B6B6B"/>
@@ -6959,7 +7694,7 @@
       </p:sp>
       <p:sp>
         <p:nvSpPr>
-          <p:cNvPr id="20" name="TextBox 19"/>
+          <p:cNvPr id="14" name="TextBox 13"/>
           <p:cNvSpPr txBox="1"/>
           <p:nvPr/>
         </p:nvSpPr>
@@ -7378,7 +8113,11 @@
               </a:defRPr>
             </a:pPr>
             <a:r>
-              <a:t>Persona + Contexte + Tâche + Format</a:t>
+              <a:t>Persona + Contexte</a:t>
+            </a:r>
+            <a:br/>
+            <a:r>
+              <a:t>+ Tâche + Format</a:t>
             </a:r>
           </a:p>
         </p:txBody>
@@ -7520,7 +8259,11 @@
               </a:defRPr>
             </a:pPr>
             <a:r>
-              <a:t>Quick Parts pour vos prompts</a:t>
+              <a:t>Quick Parts pour</a:t>
+            </a:r>
+            <a:br/>
+            <a:r>
+              <a:t>vos prompts favoris</a:t>
             </a:r>
           </a:p>
         </p:txBody>
@@ -7646,7 +8389,7 @@
               </a:defRPr>
             </a:pPr>
             <a:r>
-              <a:t>Défi: Ajoutez un persona à TOUS vos prompts cette semaine!</a:t>
+              <a:t>Défi: Ajoutez «En tant que [votre rôle]» à votre prochain prompt Copilot!</a:t>
             </a:r>
           </a:p>
         </p:txBody>
